--- a/Report/Tutorial/Diploma Theis Tutorial.pptx
+++ b/Report/Tutorial/Diploma Theis Tutorial.pptx
@@ -9,33 +9,34 @@
     <p:sldId id="282" r:id="rId3"/>
     <p:sldId id="283" r:id="rId4"/>
     <p:sldId id="284" r:id="rId5"/>
-    <p:sldId id="285" r:id="rId6"/>
-    <p:sldId id="286" r:id="rId7"/>
-    <p:sldId id="281" r:id="rId8"/>
-    <p:sldId id="258" r:id="rId9"/>
-    <p:sldId id="259" r:id="rId10"/>
-    <p:sldId id="260" r:id="rId11"/>
-    <p:sldId id="261" r:id="rId12"/>
-    <p:sldId id="262" r:id="rId13"/>
-    <p:sldId id="263" r:id="rId14"/>
-    <p:sldId id="264" r:id="rId15"/>
-    <p:sldId id="265" r:id="rId16"/>
-    <p:sldId id="266" r:id="rId17"/>
-    <p:sldId id="267" r:id="rId18"/>
-    <p:sldId id="269" r:id="rId19"/>
-    <p:sldId id="270" r:id="rId20"/>
-    <p:sldId id="271" r:id="rId21"/>
-    <p:sldId id="272" r:id="rId22"/>
-    <p:sldId id="273" r:id="rId23"/>
-    <p:sldId id="268" r:id="rId24"/>
-    <p:sldId id="274" r:id="rId25"/>
-    <p:sldId id="278" r:id="rId26"/>
-    <p:sldId id="275" r:id="rId27"/>
-    <p:sldId id="276" r:id="rId28"/>
-    <p:sldId id="257" r:id="rId29"/>
-    <p:sldId id="277" r:id="rId30"/>
-    <p:sldId id="279" r:id="rId31"/>
-    <p:sldId id="280" r:id="rId32"/>
+    <p:sldId id="287" r:id="rId6"/>
+    <p:sldId id="285" r:id="rId7"/>
+    <p:sldId id="286" r:id="rId8"/>
+    <p:sldId id="281" r:id="rId9"/>
+    <p:sldId id="258" r:id="rId10"/>
+    <p:sldId id="259" r:id="rId11"/>
+    <p:sldId id="260" r:id="rId12"/>
+    <p:sldId id="261" r:id="rId13"/>
+    <p:sldId id="262" r:id="rId14"/>
+    <p:sldId id="263" r:id="rId15"/>
+    <p:sldId id="264" r:id="rId16"/>
+    <p:sldId id="265" r:id="rId17"/>
+    <p:sldId id="266" r:id="rId18"/>
+    <p:sldId id="267" r:id="rId19"/>
+    <p:sldId id="269" r:id="rId20"/>
+    <p:sldId id="270" r:id="rId21"/>
+    <p:sldId id="271" r:id="rId22"/>
+    <p:sldId id="272" r:id="rId23"/>
+    <p:sldId id="273" r:id="rId24"/>
+    <p:sldId id="268" r:id="rId25"/>
+    <p:sldId id="274" r:id="rId26"/>
+    <p:sldId id="278" r:id="rId27"/>
+    <p:sldId id="275" r:id="rId28"/>
+    <p:sldId id="276" r:id="rId29"/>
+    <p:sldId id="257" r:id="rId30"/>
+    <p:sldId id="277" r:id="rId31"/>
+    <p:sldId id="279" r:id="rId32"/>
+    <p:sldId id="280" r:id="rId33"/>
   </p:sldIdLst>
   <p:sldSz cx="9144000" cy="6858000" type="screen4x3"/>
   <p:notesSz cx="6858000" cy="9144000"/>
@@ -319,7 +320,7 @@
             <a:fld id="{5285762B-7AAA-44B9-807D-B2D2A2593CF1}" type="datetimeFigureOut">
               <a:rPr lang="el-GR" smtClean="0"/>
               <a:pPr/>
-              <a:t>18/9/2025</a:t>
+              <a:t>19/9/2025</a:t>
             </a:fld>
             <a:endParaRPr lang="el-GR"/>
           </a:p>
@@ -486,7 +487,7 @@
             <a:fld id="{5285762B-7AAA-44B9-807D-B2D2A2593CF1}" type="datetimeFigureOut">
               <a:rPr lang="el-GR" smtClean="0"/>
               <a:pPr/>
-              <a:t>18/9/2025</a:t>
+              <a:t>19/9/2025</a:t>
             </a:fld>
             <a:endParaRPr lang="el-GR"/>
           </a:p>
@@ -663,7 +664,7 @@
             <a:fld id="{5285762B-7AAA-44B9-807D-B2D2A2593CF1}" type="datetimeFigureOut">
               <a:rPr lang="el-GR" smtClean="0"/>
               <a:pPr/>
-              <a:t>18/9/2025</a:t>
+              <a:t>19/9/2025</a:t>
             </a:fld>
             <a:endParaRPr lang="el-GR"/>
           </a:p>
@@ -830,7 +831,7 @@
             <a:fld id="{5285762B-7AAA-44B9-807D-B2D2A2593CF1}" type="datetimeFigureOut">
               <a:rPr lang="el-GR" smtClean="0"/>
               <a:pPr/>
-              <a:t>18/9/2025</a:t>
+              <a:t>19/9/2025</a:t>
             </a:fld>
             <a:endParaRPr lang="el-GR"/>
           </a:p>
@@ -1073,7 +1074,7 @@
             <a:fld id="{5285762B-7AAA-44B9-807D-B2D2A2593CF1}" type="datetimeFigureOut">
               <a:rPr lang="el-GR" smtClean="0"/>
               <a:pPr/>
-              <a:t>18/9/2025</a:t>
+              <a:t>19/9/2025</a:t>
             </a:fld>
             <a:endParaRPr lang="el-GR"/>
           </a:p>
@@ -1358,7 +1359,7 @@
             <a:fld id="{5285762B-7AAA-44B9-807D-B2D2A2593CF1}" type="datetimeFigureOut">
               <a:rPr lang="el-GR" smtClean="0"/>
               <a:pPr/>
-              <a:t>18/9/2025</a:t>
+              <a:t>19/9/2025</a:t>
             </a:fld>
             <a:endParaRPr lang="el-GR"/>
           </a:p>
@@ -1777,7 +1778,7 @@
             <a:fld id="{5285762B-7AAA-44B9-807D-B2D2A2593CF1}" type="datetimeFigureOut">
               <a:rPr lang="el-GR" smtClean="0"/>
               <a:pPr/>
-              <a:t>18/9/2025</a:t>
+              <a:t>19/9/2025</a:t>
             </a:fld>
             <a:endParaRPr lang="el-GR"/>
           </a:p>
@@ -1892,7 +1893,7 @@
             <a:fld id="{5285762B-7AAA-44B9-807D-B2D2A2593CF1}" type="datetimeFigureOut">
               <a:rPr lang="el-GR" smtClean="0"/>
               <a:pPr/>
-              <a:t>18/9/2025</a:t>
+              <a:t>19/9/2025</a:t>
             </a:fld>
             <a:endParaRPr lang="el-GR"/>
           </a:p>
@@ -1984,7 +1985,7 @@
             <a:fld id="{5285762B-7AAA-44B9-807D-B2D2A2593CF1}" type="datetimeFigureOut">
               <a:rPr lang="el-GR" smtClean="0"/>
               <a:pPr/>
-              <a:t>18/9/2025</a:t>
+              <a:t>19/9/2025</a:t>
             </a:fld>
             <a:endParaRPr lang="el-GR"/>
           </a:p>
@@ -2258,7 +2259,7 @@
             <a:fld id="{5285762B-7AAA-44B9-807D-B2D2A2593CF1}" type="datetimeFigureOut">
               <a:rPr lang="el-GR" smtClean="0"/>
               <a:pPr/>
-              <a:t>18/9/2025</a:t>
+              <a:t>19/9/2025</a:t>
             </a:fld>
             <a:endParaRPr lang="el-GR"/>
           </a:p>
@@ -2508,7 +2509,7 @@
             <a:fld id="{5285762B-7AAA-44B9-807D-B2D2A2593CF1}" type="datetimeFigureOut">
               <a:rPr lang="el-GR" smtClean="0"/>
               <a:pPr/>
-              <a:t>18/9/2025</a:t>
+              <a:t>19/9/2025</a:t>
             </a:fld>
             <a:endParaRPr lang="el-GR"/>
           </a:p>
@@ -2718,7 +2719,7 @@
             <a:fld id="{5285762B-7AAA-44B9-807D-B2D2A2593CF1}" type="datetimeFigureOut">
               <a:rPr lang="el-GR" smtClean="0"/>
               <a:pPr/>
-              <a:t>18/9/2025</a:t>
+              <a:t>19/9/2025</a:t>
             </a:fld>
             <a:endParaRPr lang="el-GR"/>
           </a:p>
@@ -3106,11 +3107,7 @@
           <a:p>
             <a:r>
               <a:rPr lang="en-US" dirty="0" smtClean="0"/>
-              <a:t>Diploma Thesis </a:t>
-            </a:r>
-            <a:r>
-              <a:rPr lang="en-US" dirty="0" smtClean="0"/>
-              <a:t>Tutorial</a:t>
+              <a:t>Diploma Thesis Tutorial</a:t>
             </a:r>
             <a:endParaRPr lang="el-GR" dirty="0"/>
           </a:p>
@@ -3193,35 +3190,120 @@
             </a:r>
             <a:r>
               <a:rPr lang="en-US" dirty="0" smtClean="0"/>
-              <a:t>Hardware (3)</a:t>
+              <a:t>Hardware (2)</a:t>
             </a:r>
             <a:endParaRPr lang="el-GR" dirty="0"/>
           </a:p>
         </p:txBody>
       </p:sp>
-      <p:pic>
-        <p:nvPicPr>
-          <p:cNvPr id="4" name="3 - Θέση περιεχομένου" descr="adxl335 &amp; rasp pi4 &amp; arduino uno.png"/>
-          <p:cNvPicPr>
-            <a:picLocks noGrp="1" noChangeAspect="1"/>
-          </p:cNvPicPr>
+      <p:sp>
+        <p:nvSpPr>
+          <p:cNvPr id="3" name="2 - Θέση περιεχομένου"/>
+          <p:cNvSpPr>
+            <a:spLocks noGrp="1"/>
+          </p:cNvSpPr>
           <p:nvPr>
             <p:ph idx="1"/>
           </p:nvPr>
-        </p:nvPicPr>
-        <p:blipFill>
-          <a:blip r:embed="rId2" cstate="print"/>
-          <a:stretch>
-            <a:fillRect/>
-          </a:stretch>
-        </p:blipFill>
-        <p:spPr>
-          <a:xfrm>
-            <a:off x="895031" y="2125671"/>
-            <a:ext cx="7353938" cy="3475021"/>
-          </a:xfrm>
-        </p:spPr>
-      </p:pic>
+        </p:nvSpPr>
+        <p:spPr/>
+        <p:txBody>
+          <a:bodyPr>
+            <a:normAutofit fontScale="92500"/>
+          </a:bodyPr>
+          <a:lstStyle/>
+          <a:p>
+            <a:r>
+              <a:rPr lang="el-GR" dirty="0" smtClean="0"/>
+              <a:t>Παροχή ρεύματος στο </a:t>
+            </a:r>
+            <a:r>
+              <a:rPr lang="el-GR" dirty="0" err="1" smtClean="0"/>
+              <a:t>αξελερόμετρο</a:t>
+            </a:r>
+            <a:r>
+              <a:rPr lang="el-GR" dirty="0" smtClean="0"/>
+              <a:t> </a:t>
+            </a:r>
+            <a:r>
+              <a:rPr lang="en-US" dirty="0" smtClean="0"/>
+              <a:t>ADXL335</a:t>
+            </a:r>
+            <a:r>
+              <a:rPr lang="el-GR" dirty="0" smtClean="0"/>
+              <a:t> από το εν λειτουργία </a:t>
+            </a:r>
+            <a:r>
+              <a:rPr lang="en-US" dirty="0" err="1" smtClean="0"/>
+              <a:t>Arduino</a:t>
+            </a:r>
+            <a:r>
+              <a:rPr lang="en-US" dirty="0" smtClean="0"/>
+              <a:t> UNO</a:t>
+            </a:r>
+          </a:p>
+          <a:p>
+            <a:r>
+              <a:rPr lang="el-GR" dirty="0" smtClean="0"/>
+              <a:t>Διαθέτει το </a:t>
+            </a:r>
+            <a:r>
+              <a:rPr lang="en-US" dirty="0" smtClean="0"/>
+              <a:t>ADXL335 </a:t>
+            </a:r>
+            <a:r>
+              <a:rPr lang="el-GR" dirty="0" smtClean="0"/>
+              <a:t>τρεις αναλογικές εξόδους για μετρήσεις στο </a:t>
+            </a:r>
+            <a:r>
+              <a:rPr lang="el-GR" dirty="0" err="1" smtClean="0"/>
+              <a:t>ορθοκανονικό</a:t>
+            </a:r>
+            <a:r>
+              <a:rPr lang="el-GR" dirty="0" smtClean="0"/>
+              <a:t> σύστημα συντεταγμένων</a:t>
+            </a:r>
+          </a:p>
+          <a:p>
+            <a:r>
+              <a:rPr lang="el-GR" dirty="0" smtClean="0"/>
+              <a:t>Οι τρεις έξοδοι </a:t>
+            </a:r>
+            <a:r>
+              <a:rPr lang="en-US" dirty="0" err="1" smtClean="0"/>
+              <a:t>x,y,z</a:t>
+            </a:r>
+            <a:r>
+              <a:rPr lang="en-US" dirty="0" smtClean="0"/>
+              <a:t> </a:t>
+            </a:r>
+            <a:r>
+              <a:rPr lang="el-GR" dirty="0" smtClean="0"/>
+              <a:t>αναπαριστώνται πάνω στο </a:t>
+            </a:r>
+            <a:r>
+              <a:rPr lang="en-US" dirty="0" smtClean="0"/>
+              <a:t>ADXL335 Breakout</a:t>
+            </a:r>
+            <a:endParaRPr lang="el-GR" dirty="0" smtClean="0"/>
+          </a:p>
+          <a:p>
+            <a:r>
+              <a:rPr lang="el-GR" dirty="0" smtClean="0"/>
+              <a:t>Οι τρεις αναλογικές έξοδοι συνδέονται σε τρεις αναλογικές εισόδους του </a:t>
+            </a:r>
+            <a:r>
+              <a:rPr lang="en-US" dirty="0" err="1" smtClean="0"/>
+              <a:t>Arduino</a:t>
+            </a:r>
+            <a:r>
+              <a:rPr lang="en-US" dirty="0" smtClean="0"/>
+              <a:t> (A0,A1,A2)</a:t>
+            </a:r>
+            <a:endParaRPr lang="el-GR" dirty="0"/>
+          </a:p>
+        </p:txBody>
+      </p:sp>
     </p:spTree>
   </p:cSld>
   <p:clrMapOvr>
@@ -3268,178 +3350,35 @@
             </a:r>
             <a:r>
               <a:rPr lang="en-US" dirty="0" smtClean="0"/>
-              <a:t>Hardware (4)</a:t>
+              <a:t>Hardware (3)</a:t>
             </a:r>
             <a:endParaRPr lang="el-GR" dirty="0"/>
           </a:p>
         </p:txBody>
       </p:sp>
-      <p:sp>
-        <p:nvSpPr>
-          <p:cNvPr id="3" name="2 - Θέση περιεχομένου"/>
-          <p:cNvSpPr>
-            <a:spLocks noGrp="1"/>
-          </p:cNvSpPr>
+      <p:pic>
+        <p:nvPicPr>
+          <p:cNvPr id="6" name="5 - Θέση περιεχομένου" descr="System.png"/>
+          <p:cNvPicPr>
+            <a:picLocks noGrp="1" noChangeAspect="1"/>
+          </p:cNvPicPr>
           <p:nvPr>
             <p:ph idx="1"/>
           </p:nvPr>
-        </p:nvSpPr>
-        <p:spPr/>
-        <p:txBody>
-          <a:bodyPr/>
-          <a:lstStyle/>
-          <a:p>
-            <a:r>
-              <a:rPr lang="el-GR" dirty="0" smtClean="0"/>
-              <a:t>Το</a:t>
-            </a:r>
-            <a:r>
-              <a:rPr lang="en-US" dirty="0" smtClean="0"/>
-              <a:t> </a:t>
-            </a:r>
-            <a:r>
-              <a:rPr lang="en-US" dirty="0" err="1" smtClean="0"/>
-              <a:t>Arduino</a:t>
-            </a:r>
-            <a:r>
-              <a:rPr lang="en-US" dirty="0" smtClean="0"/>
-              <a:t> </a:t>
-            </a:r>
-            <a:r>
-              <a:rPr lang="el-GR" dirty="0" smtClean="0"/>
-              <a:t>συνδέεται σε ένα </a:t>
-            </a:r>
-            <a:r>
-              <a:rPr lang="en-US" dirty="0" smtClean="0"/>
-              <a:t>Raspberry Pi 4 </a:t>
-            </a:r>
-          </a:p>
-          <a:p>
-            <a:r>
-              <a:rPr lang="el-GR" dirty="0" smtClean="0"/>
-              <a:t>Η σύνδεση γίνεται μεταξύ της </a:t>
-            </a:r>
-            <a:r>
-              <a:rPr lang="en-US" dirty="0" smtClean="0"/>
-              <a:t>Serial Port </a:t>
-            </a:r>
-            <a:r>
-              <a:rPr lang="el-GR" dirty="0" smtClean="0"/>
-              <a:t>του </a:t>
-            </a:r>
-            <a:r>
-              <a:rPr lang="en-US" dirty="0" err="1" smtClean="0"/>
-              <a:t>Arduino</a:t>
-            </a:r>
-            <a:r>
-              <a:rPr lang="en-US" dirty="0" smtClean="0"/>
-              <a:t> </a:t>
-            </a:r>
-            <a:r>
-              <a:rPr lang="el-GR" dirty="0" smtClean="0"/>
-              <a:t>και </a:t>
-            </a:r>
-            <a:r>
-              <a:rPr lang="en-US" dirty="0" smtClean="0"/>
-              <a:t>USB port </a:t>
-            </a:r>
-            <a:r>
-              <a:rPr lang="el-GR" dirty="0" smtClean="0"/>
-              <a:t>του </a:t>
-            </a:r>
-            <a:r>
-              <a:rPr lang="de-DE" dirty="0" err="1" smtClean="0"/>
-              <a:t>Raspberr</a:t>
-            </a:r>
-            <a:r>
-              <a:rPr lang="en-US" dirty="0" smtClean="0"/>
-              <a:t>y Pi</a:t>
-            </a:r>
-          </a:p>
-          <a:p>
-            <a:r>
-              <a:rPr lang="el-GR" dirty="0" smtClean="0"/>
-              <a:t>Αυτό αποσκοπεί στην διοχέτευση δεδομένων από το </a:t>
-            </a:r>
-            <a:r>
-              <a:rPr lang="en-US" dirty="0" err="1" smtClean="0"/>
-              <a:t>Arduino</a:t>
-            </a:r>
-            <a:r>
-              <a:rPr lang="en-US" dirty="0" smtClean="0"/>
-              <a:t> </a:t>
-            </a:r>
-            <a:r>
-              <a:rPr lang="el-GR" dirty="0" smtClean="0"/>
-              <a:t>στο </a:t>
-            </a:r>
-            <a:r>
-              <a:rPr lang="de-DE" dirty="0" err="1" smtClean="0"/>
-              <a:t>Raspberr</a:t>
-            </a:r>
-            <a:r>
-              <a:rPr lang="en-US" dirty="0" smtClean="0"/>
-              <a:t>y</a:t>
-            </a:r>
-            <a:endParaRPr lang="el-GR" dirty="0" smtClean="0"/>
-          </a:p>
-          <a:p>
-            <a:r>
-              <a:rPr lang="el-GR" dirty="0" smtClean="0"/>
-              <a:t>Πιο συγκεκριμένα το </a:t>
-            </a:r>
-            <a:r>
-              <a:rPr lang="en-US" dirty="0" err="1" smtClean="0"/>
-              <a:t>Arduino</a:t>
-            </a:r>
-            <a:r>
-              <a:rPr lang="en-US" dirty="0" smtClean="0"/>
-              <a:t> </a:t>
-            </a:r>
-            <a:r>
-              <a:rPr lang="el-GR" dirty="0" smtClean="0"/>
-              <a:t>λαμβάνει μετρήσεις από το αισθητήριο και το </a:t>
-            </a:r>
-            <a:r>
-              <a:rPr lang="en-US" dirty="0" smtClean="0"/>
-              <a:t>sketch </a:t>
-            </a:r>
-            <a:r>
-              <a:rPr lang="el-GR" dirty="0" smtClean="0"/>
-              <a:t>εκφράζει τα </a:t>
-            </a:r>
-            <a:r>
-              <a:rPr lang="en-US" dirty="0" smtClean="0"/>
-              <a:t>V </a:t>
-            </a:r>
-            <a:r>
-              <a:rPr lang="el-GR" dirty="0" smtClean="0"/>
-              <a:t>σε </a:t>
-            </a:r>
-            <a:r>
-              <a:rPr lang="en-US" dirty="0" smtClean="0"/>
-              <a:t>g-unit </a:t>
-            </a:r>
-            <a:r>
-              <a:rPr lang="el-GR" dirty="0" smtClean="0"/>
-              <a:t>ή σε </a:t>
-            </a:r>
-            <a:r>
-              <a:rPr lang="en-US" dirty="0" smtClean="0"/>
-              <a:t>mm/s</a:t>
-            </a:r>
-            <a:r>
-              <a:rPr lang="en-US" baseline="30000" dirty="0" smtClean="0"/>
-              <a:t>2</a:t>
-            </a:r>
-            <a:r>
-              <a:rPr lang="en-US" dirty="0" smtClean="0"/>
-              <a:t> </a:t>
-            </a:r>
-            <a:endParaRPr lang="el-GR" baseline="30000" dirty="0"/>
-          </a:p>
-        </p:txBody>
-      </p:sp>
+        </p:nvPicPr>
+        <p:blipFill>
+          <a:blip r:embed="rId2" cstate="print"/>
+          <a:stretch>
+            <a:fillRect/>
+          </a:stretch>
+        </p:blipFill>
+        <p:spPr>
+          <a:xfrm>
+            <a:off x="1081417" y="1600200"/>
+            <a:ext cx="6981166" cy="4525963"/>
+          </a:xfrm>
+        </p:spPr>
+      </p:pic>
     </p:spTree>
   </p:cSld>
   <p:clrMapOvr>
@@ -3477,9 +3416,7 @@
         </p:nvSpPr>
         <p:spPr/>
         <p:txBody>
-          <a:bodyPr>
-            <a:normAutofit/>
-          </a:bodyPr>
+          <a:bodyPr/>
           <a:lstStyle/>
           <a:p>
             <a:r>
@@ -3488,10 +3425,33 @@
             </a:r>
             <a:r>
               <a:rPr lang="en-US" dirty="0" smtClean="0"/>
-              <a:t>Software</a:t>
-            </a:r>
-            <a:r>
-              <a:rPr lang="el-GR" dirty="0" smtClean="0"/>
+              <a:t>Hardware (4)</a:t>
+            </a:r>
+            <a:endParaRPr lang="el-GR" dirty="0"/>
+          </a:p>
+        </p:txBody>
+      </p:sp>
+      <p:sp>
+        <p:nvSpPr>
+          <p:cNvPr id="3" name="2 - Θέση περιεχομένου"/>
+          <p:cNvSpPr>
+            <a:spLocks noGrp="1"/>
+          </p:cNvSpPr>
+          <p:nvPr>
+            <p:ph idx="1"/>
+          </p:nvPr>
+        </p:nvSpPr>
+        <p:spPr/>
+        <p:txBody>
+          <a:bodyPr/>
+          <a:lstStyle/>
+          <a:p>
+            <a:r>
+              <a:rPr lang="el-GR" dirty="0" smtClean="0"/>
+              <a:t>Το</a:t>
+            </a:r>
+            <a:r>
+              <a:rPr lang="en-US" dirty="0" smtClean="0"/>
               <a:t> </a:t>
             </a:r>
             <a:r>
@@ -3500,127 +3460,140 @@
             </a:r>
             <a:r>
               <a:rPr lang="en-US" dirty="0" smtClean="0"/>
-              <a:t> (1)</a:t>
-            </a:r>
-            <a:endParaRPr lang="el-GR" dirty="0"/>
-          </a:p>
-        </p:txBody>
-      </p:sp>
-      <p:sp>
-        <p:nvSpPr>
-          <p:cNvPr id="3" name="2 - Θέση περιεχομένου"/>
-          <p:cNvSpPr>
-            <a:spLocks noGrp="1"/>
-          </p:cNvSpPr>
-          <p:nvPr>
-            <p:ph idx="1"/>
-          </p:nvPr>
-        </p:nvSpPr>
-        <p:spPr/>
-        <p:txBody>
-          <a:bodyPr>
-            <a:normAutofit fontScale="77500" lnSpcReduction="20000"/>
-          </a:bodyPr>
-          <a:lstStyle/>
-          <a:p>
-            <a:r>
-              <a:rPr lang="el-GR" dirty="0" smtClean="0"/>
-              <a:t>Το </a:t>
-            </a:r>
-            <a:r>
-              <a:rPr lang="en-US" dirty="0" smtClean="0"/>
-              <a:t>sketch</a:t>
-            </a:r>
-            <a:r>
-              <a:rPr lang="el-GR" dirty="0" smtClean="0"/>
-              <a:t> που χρησιμοποιώ για τις μετρήσεις λαμβάνει τις αναλογικές τιμές από το αισθητήριο χωρίς περαιτέρω επεξεργασία</a:t>
-            </a:r>
-          </a:p>
-          <a:p>
-            <a:r>
-              <a:rPr lang="el-GR" dirty="0" smtClean="0"/>
-              <a:t>Εναλλακτικά μπορούμε να χρησιμοποιήσουμε </a:t>
-            </a:r>
-            <a:r>
-              <a:rPr lang="en-US" dirty="0" smtClean="0"/>
-              <a:t>source code </a:t>
-            </a:r>
-            <a:r>
-              <a:rPr lang="el-GR" dirty="0" smtClean="0"/>
-              <a:t>όπως φαίνεται στην δεύτερη φωτογραφία για να κάνει την ίδια διαδικασία όμως να στείλει δεδομένα σε μορφή </a:t>
-            </a:r>
-            <a:r>
-              <a:rPr lang="en-US" dirty="0" smtClean="0"/>
-              <a:t>g</a:t>
-            </a:r>
-            <a:r>
-              <a:rPr lang="el-GR" dirty="0" smtClean="0"/>
-              <a:t> αφότου έχει </a:t>
-            </a:r>
-            <a:r>
-              <a:rPr lang="el-GR" dirty="0" err="1" smtClean="0"/>
-              <a:t>καλιμπράρει</a:t>
-            </a:r>
-            <a:r>
-              <a:rPr lang="el-GR" dirty="0" smtClean="0"/>
-              <a:t> μόνο του σε κάποια όρια τιμών</a:t>
-            </a:r>
-          </a:p>
-          <a:p>
-            <a:r>
-              <a:rPr lang="el-GR" dirty="0" smtClean="0"/>
-              <a:t>Ο λόγος που προτιμάω την πρώτη επιλογή σε πρώτη φάση είναι επειδή η συχνότητα συνδέεται άμεσα με την μετρούμενη τάση χωρίς να χάνεται πληροφορία πριν τον μετασχηματισμό </a:t>
-            </a:r>
-            <a:r>
-              <a:rPr lang="en-US" dirty="0" smtClean="0"/>
-              <a:t>Fourier</a:t>
+              <a:t> </a:t>
+            </a:r>
+            <a:r>
+              <a:rPr lang="el-GR" dirty="0" smtClean="0"/>
+              <a:t>συνδέεται σε ένα </a:t>
+            </a:r>
+            <a:r>
+              <a:rPr lang="en-US" dirty="0" smtClean="0"/>
+              <a:t>Raspberry Pi 4 </a:t>
+            </a:r>
+          </a:p>
+          <a:p>
+            <a:r>
+              <a:rPr lang="el-GR" dirty="0" smtClean="0"/>
+              <a:t>Η σύνδεση γίνεται μεταξύ της </a:t>
+            </a:r>
+            <a:r>
+              <a:rPr lang="en-US" dirty="0" smtClean="0"/>
+              <a:t>Serial Port </a:t>
+            </a:r>
+            <a:r>
+              <a:rPr lang="el-GR" dirty="0" smtClean="0"/>
+              <a:t>του </a:t>
+            </a:r>
+            <a:r>
+              <a:rPr lang="en-US" dirty="0" err="1" smtClean="0"/>
+              <a:t>Arduino</a:t>
+            </a:r>
+            <a:r>
+              <a:rPr lang="en-US" dirty="0" smtClean="0"/>
+              <a:t> </a:t>
+            </a:r>
+            <a:r>
+              <a:rPr lang="el-GR" dirty="0" smtClean="0"/>
+              <a:t>και </a:t>
+            </a:r>
+            <a:r>
+              <a:rPr lang="en-US" dirty="0" smtClean="0"/>
+              <a:t>USB port </a:t>
+            </a:r>
+            <a:r>
+              <a:rPr lang="el-GR" dirty="0" smtClean="0"/>
+              <a:t>του </a:t>
+            </a:r>
+            <a:r>
+              <a:rPr lang="de-DE" dirty="0" err="1" smtClean="0"/>
+              <a:t>Raspberr</a:t>
+            </a:r>
+            <a:r>
+              <a:rPr lang="en-US" dirty="0" smtClean="0"/>
+              <a:t>y Pi</a:t>
+            </a:r>
+          </a:p>
+          <a:p>
+            <a:r>
+              <a:rPr lang="el-GR" dirty="0" smtClean="0"/>
+              <a:t>Αυτό αποσκοπεί στην διοχέτευση δεδομένων από το </a:t>
+            </a:r>
+            <a:r>
+              <a:rPr lang="en-US" dirty="0" err="1" smtClean="0"/>
+              <a:t>Arduino</a:t>
+            </a:r>
+            <a:r>
+              <a:rPr lang="en-US" dirty="0" smtClean="0"/>
+              <a:t> </a:t>
+            </a:r>
+            <a:r>
+              <a:rPr lang="el-GR" dirty="0" smtClean="0"/>
+              <a:t>στο </a:t>
+            </a:r>
+            <a:r>
+              <a:rPr lang="de-DE" dirty="0" err="1" smtClean="0"/>
+              <a:t>Raspberr</a:t>
+            </a:r>
+            <a:r>
+              <a:rPr lang="en-US" dirty="0" smtClean="0"/>
+              <a:t>y</a:t>
             </a:r>
             <a:endParaRPr lang="el-GR" dirty="0" smtClean="0"/>
           </a:p>
           <a:p>
             <a:r>
-              <a:rPr lang="en-US" dirty="0" smtClean="0">
-                <a:hlinkClick r:id="rId2"/>
-              </a:rPr>
-              <a:t>Vibration-Analysis-Project/</a:t>
-            </a:r>
-            <a:r>
-              <a:rPr lang="en-US" dirty="0" err="1" smtClean="0">
-                <a:hlinkClick r:id="rId2"/>
-              </a:rPr>
-              <a:t>arduino</a:t>
-            </a:r>
-            <a:r>
-              <a:rPr lang="en-US" dirty="0" smtClean="0">
-                <a:hlinkClick r:id="rId2"/>
-              </a:rPr>
-              <a:t>/</a:t>
-            </a:r>
-            <a:r>
-              <a:rPr lang="en-US" dirty="0" err="1" smtClean="0">
-                <a:hlinkClick r:id="rId2"/>
-              </a:rPr>
-              <a:t>src</a:t>
-            </a:r>
-            <a:r>
-              <a:rPr lang="en-US" dirty="0" smtClean="0">
-                <a:hlinkClick r:id="rId2"/>
-              </a:rPr>
-              <a:t> at main · </a:t>
-            </a:r>
-            <a:r>
-              <a:rPr lang="en-US" dirty="0" err="1" smtClean="0">
-                <a:hlinkClick r:id="rId2"/>
-              </a:rPr>
-              <a:t>Vasilisdi</a:t>
-            </a:r>
-            <a:r>
-              <a:rPr lang="en-US" dirty="0" smtClean="0">
-                <a:hlinkClick r:id="rId2"/>
-              </a:rPr>
-              <a:t>/Vibration-Analysis-Project</a:t>
-            </a:r>
-            <a:endParaRPr lang="el-GR" dirty="0"/>
+              <a:rPr lang="el-GR" dirty="0" smtClean="0"/>
+              <a:t>Πιο συγκεκριμένα το </a:t>
+            </a:r>
+            <a:r>
+              <a:rPr lang="en-US" dirty="0" err="1" smtClean="0"/>
+              <a:t>Arduino</a:t>
+            </a:r>
+            <a:r>
+              <a:rPr lang="en-US" dirty="0" smtClean="0"/>
+              <a:t> </a:t>
+            </a:r>
+            <a:r>
+              <a:rPr lang="el-GR" dirty="0" smtClean="0"/>
+              <a:t>λαμβάνει μετρήσεις από το αισθητήριο και το </a:t>
+            </a:r>
+            <a:r>
+              <a:rPr lang="en-US" dirty="0" smtClean="0"/>
+              <a:t>sketch </a:t>
+            </a:r>
+            <a:r>
+              <a:rPr lang="el-GR" dirty="0" smtClean="0"/>
+              <a:t>εκφράζει τα </a:t>
+            </a:r>
+            <a:r>
+              <a:rPr lang="en-US" dirty="0" smtClean="0"/>
+              <a:t>V </a:t>
+            </a:r>
+            <a:r>
+              <a:rPr lang="el-GR" dirty="0" smtClean="0"/>
+              <a:t>σε </a:t>
+            </a:r>
+            <a:r>
+              <a:rPr lang="en-US" dirty="0" smtClean="0"/>
+              <a:t>g-unit </a:t>
+            </a:r>
+            <a:r>
+              <a:rPr lang="el-GR" dirty="0" smtClean="0"/>
+              <a:t>ή σε </a:t>
+            </a:r>
+            <a:r>
+              <a:rPr lang="en-US" dirty="0" smtClean="0"/>
+              <a:t>mm/s</a:t>
+            </a:r>
+            <a:r>
+              <a:rPr lang="en-US" baseline="30000" dirty="0" smtClean="0"/>
+              <a:t>2</a:t>
+            </a:r>
+            <a:r>
+              <a:rPr lang="en-US" dirty="0" smtClean="0"/>
+              <a:t> </a:t>
+            </a:r>
+            <a:endParaRPr lang="el-GR" baseline="30000" dirty="0"/>
           </a:p>
         </p:txBody>
       </p:sp>
@@ -3661,7 +3634,9 @@
         </p:nvSpPr>
         <p:spPr/>
         <p:txBody>
-          <a:bodyPr/>
+          <a:bodyPr>
+            <a:normAutofit/>
+          </a:bodyPr>
           <a:lstStyle/>
           <a:p>
             <a:r>
@@ -3682,43 +3657,130 @@
             </a:r>
             <a:r>
               <a:rPr lang="en-US" dirty="0" smtClean="0"/>
-              <a:t> (</a:t>
-            </a:r>
-            <a:r>
-              <a:rPr lang="el-GR" dirty="0" smtClean="0"/>
-              <a:t>2</a:t>
-            </a:r>
-            <a:r>
-              <a:rPr lang="en-US" dirty="0" smtClean="0"/>
-              <a:t>)</a:t>
+              <a:t> (1)</a:t>
             </a:r>
             <a:endParaRPr lang="el-GR" dirty="0"/>
           </a:p>
         </p:txBody>
       </p:sp>
-      <p:pic>
-        <p:nvPicPr>
-          <p:cNvPr id="4" name="3 - Θέση περιεχομένου" descr="arduino ino sketch.png"/>
-          <p:cNvPicPr>
-            <a:picLocks noGrp="1" noChangeAspect="1"/>
-          </p:cNvPicPr>
+      <p:sp>
+        <p:nvSpPr>
+          <p:cNvPr id="3" name="2 - Θέση περιεχομένου"/>
+          <p:cNvSpPr>
+            <a:spLocks noGrp="1"/>
+          </p:cNvSpPr>
           <p:nvPr>
             <p:ph idx="1"/>
           </p:nvPr>
-        </p:nvPicPr>
-        <p:blipFill>
-          <a:blip r:embed="rId2" cstate="print"/>
-          <a:stretch>
-            <a:fillRect/>
-          </a:stretch>
-        </p:blipFill>
-        <p:spPr>
-          <a:xfrm>
-            <a:off x="615190" y="1600200"/>
-            <a:ext cx="7913619" cy="4525963"/>
-          </a:xfrm>
-        </p:spPr>
-      </p:pic>
+        </p:nvSpPr>
+        <p:spPr/>
+        <p:txBody>
+          <a:bodyPr>
+            <a:normAutofit fontScale="77500" lnSpcReduction="20000"/>
+          </a:bodyPr>
+          <a:lstStyle/>
+          <a:p>
+            <a:r>
+              <a:rPr lang="el-GR" dirty="0" smtClean="0"/>
+              <a:t>Το </a:t>
+            </a:r>
+            <a:r>
+              <a:rPr lang="en-US" dirty="0" smtClean="0"/>
+              <a:t>sketch</a:t>
+            </a:r>
+            <a:r>
+              <a:rPr lang="el-GR" dirty="0" smtClean="0"/>
+              <a:t> που χρησιμοποιώ για τις μετρήσεις λαμβάνει τις αναλογικές τιμές από το αισθητήριο χωρίς περαιτέρω επεξεργασία</a:t>
+            </a:r>
+          </a:p>
+          <a:p>
+            <a:r>
+              <a:rPr lang="el-GR" dirty="0" smtClean="0"/>
+              <a:t>Εναλλακτικά μπορούμε να χρησιμοποιήσουμε </a:t>
+            </a:r>
+            <a:r>
+              <a:rPr lang="en-US" dirty="0" smtClean="0"/>
+              <a:t>source code </a:t>
+            </a:r>
+            <a:r>
+              <a:rPr lang="el-GR" dirty="0" smtClean="0"/>
+              <a:t>όπως φαίνεται στην δεύτερη φωτογραφία για να κάνει την ίδια διαδικασία όμως να στείλει δεδομένα σε μορφή </a:t>
+            </a:r>
+            <a:r>
+              <a:rPr lang="en-US" dirty="0" smtClean="0"/>
+              <a:t>g</a:t>
+            </a:r>
+            <a:r>
+              <a:rPr lang="el-GR" dirty="0" smtClean="0"/>
+              <a:t> αφότου έχει </a:t>
+            </a:r>
+            <a:r>
+              <a:rPr lang="el-GR" dirty="0" err="1" smtClean="0"/>
+              <a:t>καλιμπράρει</a:t>
+            </a:r>
+            <a:r>
+              <a:rPr lang="el-GR" dirty="0" smtClean="0"/>
+              <a:t> μόνο του σε κάποια όρια τιμών</a:t>
+            </a:r>
+          </a:p>
+          <a:p>
+            <a:r>
+              <a:rPr lang="el-GR" dirty="0" smtClean="0"/>
+              <a:t>Ο λόγος που προτιμάω την πρώτη επιλογή σε πρώτη φάση είναι επειδή η συχνότητα συνδέεται άμεσα με την μετρούμενη τάση χωρίς να χάνεται πληροφορία πριν τον μετασχηματισμό </a:t>
+            </a:r>
+            <a:r>
+              <a:rPr lang="en-US" dirty="0" smtClean="0"/>
+              <a:t>Fourier</a:t>
+            </a:r>
+            <a:endParaRPr lang="el-GR" dirty="0" smtClean="0"/>
+          </a:p>
+          <a:p>
+            <a:r>
+              <a:rPr lang="en-US" dirty="0" smtClean="0">
+                <a:hlinkClick r:id="rId2"/>
+              </a:rPr>
+              <a:t>Vibration-Analysis-Project/</a:t>
+            </a:r>
+            <a:r>
+              <a:rPr lang="en-US" dirty="0" err="1" smtClean="0">
+                <a:hlinkClick r:id="rId2"/>
+              </a:rPr>
+              <a:t>arduino</a:t>
+            </a:r>
+            <a:r>
+              <a:rPr lang="en-US" dirty="0" smtClean="0">
+                <a:hlinkClick r:id="rId2"/>
+              </a:rPr>
+              <a:t>/</a:t>
+            </a:r>
+            <a:r>
+              <a:rPr lang="en-US" dirty="0" err="1" smtClean="0">
+                <a:hlinkClick r:id="rId2"/>
+              </a:rPr>
+              <a:t>src</a:t>
+            </a:r>
+            <a:r>
+              <a:rPr lang="en-US" dirty="0" smtClean="0">
+                <a:hlinkClick r:id="rId2"/>
+              </a:rPr>
+              <a:t> at main · </a:t>
+            </a:r>
+            <a:r>
+              <a:rPr lang="en-US" dirty="0" err="1" smtClean="0">
+                <a:hlinkClick r:id="rId2"/>
+              </a:rPr>
+              <a:t>Vasilisdi</a:t>
+            </a:r>
+            <a:r>
+              <a:rPr lang="en-US" dirty="0" smtClean="0">
+                <a:hlinkClick r:id="rId2"/>
+              </a:rPr>
+              <a:t>/Vibration-Analysis-Project</a:t>
+            </a:r>
+            <a:endParaRPr lang="el-GR" dirty="0"/>
+          </a:p>
+        </p:txBody>
+      </p:sp>
     </p:spTree>
   </p:cSld>
   <p:clrMapOvr>
@@ -3781,7 +3843,7 @@
             </a:r>
             <a:r>
               <a:rPr lang="el-GR" dirty="0" smtClean="0"/>
-              <a:t>3</a:t>
+              <a:t>2</a:t>
             </a:r>
             <a:r>
               <a:rPr lang="en-US" dirty="0" smtClean="0"/>
@@ -3793,7 +3855,7 @@
       </p:sp>
       <p:pic>
         <p:nvPicPr>
-          <p:cNvPr id="4" name="3 - Θέση περιεχομένου" descr="source code sketch.png"/>
+          <p:cNvPr id="4" name="3 - Θέση περιεχομένου" descr="arduino ino sketch.png"/>
           <p:cNvPicPr>
             <a:picLocks noGrp="1" noChangeAspect="1"/>
           </p:cNvPicPr>
@@ -3809,8 +3871,8 @@
         </p:blipFill>
         <p:spPr>
           <a:xfrm>
-            <a:off x="3239992" y="1600200"/>
-            <a:ext cx="2664016" cy="4525963"/>
+            <a:off x="615190" y="1600200"/>
+            <a:ext cx="7913619" cy="4525963"/>
           </a:xfrm>
         </p:spPr>
       </p:pic>
@@ -3867,8 +3929,20 @@
               <a:t> </a:t>
             </a:r>
             <a:r>
-              <a:rPr lang="en-US" dirty="0" smtClean="0"/>
-              <a:t>Raspberry (1)</a:t>
+              <a:rPr lang="en-US" dirty="0" err="1" smtClean="0"/>
+              <a:t>Arduino</a:t>
+            </a:r>
+            <a:r>
+              <a:rPr lang="en-US" dirty="0" smtClean="0"/>
+              <a:t> (</a:t>
+            </a:r>
+            <a:r>
+              <a:rPr lang="el-GR" dirty="0" smtClean="0"/>
+              <a:t>3</a:t>
+            </a:r>
+            <a:r>
+              <a:rPr lang="en-US" dirty="0" smtClean="0"/>
+              <a:t>)</a:t>
             </a:r>
             <a:endParaRPr lang="el-GR" dirty="0"/>
           </a:p>
@@ -3876,7 +3950,7 @@
       </p:sp>
       <p:pic>
         <p:nvPicPr>
-          <p:cNvPr id="4" name="3 - Θέση περιεχομένου" descr="Initializing Raspberry project.png"/>
+          <p:cNvPr id="4" name="3 - Θέση περιεχομένου" descr="source code sketch.png"/>
           <p:cNvPicPr>
             <a:picLocks noGrp="1" noChangeAspect="1"/>
           </p:cNvPicPr>
@@ -3892,8 +3966,8 @@
         </p:blipFill>
         <p:spPr>
           <a:xfrm>
-            <a:off x="457200" y="1773372"/>
-            <a:ext cx="8229600" cy="4179618"/>
+            <a:off x="3239992" y="1600200"/>
+            <a:ext cx="2664016" cy="4525963"/>
           </a:xfrm>
         </p:spPr>
       </p:pic>
@@ -3951,82 +4025,35 @@
             </a:r>
             <a:r>
               <a:rPr lang="en-US" dirty="0" smtClean="0"/>
-              <a:t>Raspberry (2)</a:t>
+              <a:t>Raspberry (1)</a:t>
             </a:r>
             <a:endParaRPr lang="el-GR" dirty="0"/>
           </a:p>
         </p:txBody>
       </p:sp>
-      <p:sp>
-        <p:nvSpPr>
-          <p:cNvPr id="3" name="2 - Θέση περιεχομένου"/>
-          <p:cNvSpPr>
-            <a:spLocks noGrp="1"/>
-          </p:cNvSpPr>
+      <p:pic>
+        <p:nvPicPr>
+          <p:cNvPr id="4" name="3 - Θέση περιεχομένου" descr="Initializing Raspberry project.png"/>
+          <p:cNvPicPr>
+            <a:picLocks noGrp="1" noChangeAspect="1"/>
+          </p:cNvPicPr>
           <p:nvPr>
             <p:ph idx="1"/>
           </p:nvPr>
-        </p:nvSpPr>
-        <p:spPr/>
-        <p:txBody>
-          <a:bodyPr/>
-          <a:lstStyle/>
-          <a:p>
-            <a:r>
-              <a:rPr lang="el-GR" dirty="0" smtClean="0"/>
-              <a:t>Δημιουργία ενός περιβάλλοντος </a:t>
-            </a:r>
-            <a:r>
-              <a:rPr lang="en-US" dirty="0" smtClean="0"/>
-              <a:t>poetry </a:t>
-            </a:r>
-            <a:r>
-              <a:rPr lang="el-GR" dirty="0" smtClean="0"/>
-              <a:t>στο οποίο θα περιλαμβάνονται μόνο τα απαραίτητα </a:t>
-            </a:r>
-            <a:r>
-              <a:rPr lang="de-DE" dirty="0" err="1" smtClean="0"/>
-              <a:t>libs</a:t>
-            </a:r>
-            <a:r>
-              <a:rPr lang="de-DE" dirty="0" smtClean="0"/>
-              <a:t> </a:t>
-            </a:r>
-            <a:endParaRPr lang="en-US" dirty="0" smtClean="0"/>
-          </a:p>
-          <a:p>
-            <a:r>
-              <a:rPr lang="en-US" dirty="0" smtClean="0"/>
-              <a:t>poetry </a:t>
-            </a:r>
-            <a:r>
-              <a:rPr lang="en-US" dirty="0" err="1" smtClean="0"/>
-              <a:t>config</a:t>
-            </a:r>
-            <a:r>
-              <a:rPr lang="en-US" dirty="0" smtClean="0"/>
-              <a:t> </a:t>
-            </a:r>
-            <a:r>
-              <a:rPr lang="en-US" dirty="0" err="1" smtClean="0"/>
-              <a:t>virtualenvs.in</a:t>
-            </a:r>
-            <a:r>
-              <a:rPr lang="en-US" dirty="0" smtClean="0"/>
-              <a:t>-project true </a:t>
-            </a:r>
-            <a:r>
-              <a:rPr lang="el-GR" dirty="0" smtClean="0"/>
-              <a:t>για να τρέξει μόνο μέσα στο </a:t>
-            </a:r>
-            <a:r>
-              <a:rPr lang="en-US" dirty="0" smtClean="0"/>
-              <a:t>project folder</a:t>
-            </a:r>
-            <a:endParaRPr lang="el-GR" dirty="0"/>
-          </a:p>
-        </p:txBody>
-      </p:sp>
+        </p:nvPicPr>
+        <p:blipFill>
+          <a:blip r:embed="rId2" cstate="print"/>
+          <a:stretch>
+            <a:fillRect/>
+          </a:stretch>
+        </p:blipFill>
+        <p:spPr>
+          <a:xfrm>
+            <a:off x="457200" y="1773372"/>
+            <a:ext cx="8229600" cy="4179618"/>
+          </a:xfrm>
+        </p:spPr>
+      </p:pic>
     </p:spTree>
   </p:cSld>
   <p:clrMapOvr>
@@ -4036,6 +4063,136 @@
 </file>
 
 <file path=ppt/slides/slide17.xml><?xml version="1.0" encoding="utf-8"?>
+<p:sld xmlns:a="http://schemas.openxmlformats.org/drawingml/2006/main" xmlns:r="http://schemas.openxmlformats.org/officeDocument/2006/relationships" xmlns:p="http://schemas.openxmlformats.org/presentationml/2006/main">
+  <p:cSld>
+    <p:spTree>
+      <p:nvGrpSpPr>
+        <p:cNvPr id="1" name=""/>
+        <p:cNvGrpSpPr/>
+        <p:nvPr/>
+      </p:nvGrpSpPr>
+      <p:grpSpPr>
+        <a:xfrm>
+          <a:off x="0" y="0"/>
+          <a:ext cx="0" cy="0"/>
+          <a:chOff x="0" y="0"/>
+          <a:chExt cx="0" cy="0"/>
+        </a:xfrm>
+      </p:grpSpPr>
+      <p:sp>
+        <p:nvSpPr>
+          <p:cNvPr id="2" name="1 - Τίτλος"/>
+          <p:cNvSpPr>
+            <a:spLocks noGrp="1"/>
+          </p:cNvSpPr>
+          <p:nvPr>
+            <p:ph type="title"/>
+          </p:nvPr>
+        </p:nvSpPr>
+        <p:spPr/>
+        <p:txBody>
+          <a:bodyPr/>
+          <a:lstStyle/>
+          <a:p>
+            <a:r>
+              <a:rPr lang="el-GR" dirty="0" smtClean="0"/>
+              <a:t>Περιγραφή </a:t>
+            </a:r>
+            <a:r>
+              <a:rPr lang="en-US" dirty="0" smtClean="0"/>
+              <a:t>Software</a:t>
+            </a:r>
+            <a:r>
+              <a:rPr lang="el-GR" dirty="0" smtClean="0"/>
+              <a:t> </a:t>
+            </a:r>
+            <a:r>
+              <a:rPr lang="en-US" dirty="0" smtClean="0"/>
+              <a:t>Raspberry (2)</a:t>
+            </a:r>
+            <a:endParaRPr lang="el-GR" dirty="0"/>
+          </a:p>
+        </p:txBody>
+      </p:sp>
+      <p:sp>
+        <p:nvSpPr>
+          <p:cNvPr id="3" name="2 - Θέση περιεχομένου"/>
+          <p:cNvSpPr>
+            <a:spLocks noGrp="1"/>
+          </p:cNvSpPr>
+          <p:nvPr>
+            <p:ph idx="1"/>
+          </p:nvPr>
+        </p:nvSpPr>
+        <p:spPr/>
+        <p:txBody>
+          <a:bodyPr/>
+          <a:lstStyle/>
+          <a:p>
+            <a:r>
+              <a:rPr lang="el-GR" dirty="0" smtClean="0"/>
+              <a:t>Δημιουργία ενός περιβάλλοντος </a:t>
+            </a:r>
+            <a:r>
+              <a:rPr lang="en-US" dirty="0" smtClean="0"/>
+              <a:t>poetry </a:t>
+            </a:r>
+            <a:r>
+              <a:rPr lang="el-GR" dirty="0" smtClean="0"/>
+              <a:t>στο οποίο θα περιλαμβάνονται μόνο τα απαραίτητα </a:t>
+            </a:r>
+            <a:r>
+              <a:rPr lang="de-DE" dirty="0" err="1" smtClean="0"/>
+              <a:t>libs</a:t>
+            </a:r>
+            <a:r>
+              <a:rPr lang="de-DE" dirty="0" smtClean="0"/>
+              <a:t> </a:t>
+            </a:r>
+            <a:endParaRPr lang="en-US" dirty="0" smtClean="0"/>
+          </a:p>
+          <a:p>
+            <a:r>
+              <a:rPr lang="en-US" dirty="0" smtClean="0"/>
+              <a:t>poetry </a:t>
+            </a:r>
+            <a:r>
+              <a:rPr lang="en-US" dirty="0" err="1" smtClean="0"/>
+              <a:t>config</a:t>
+            </a:r>
+            <a:r>
+              <a:rPr lang="en-US" dirty="0" smtClean="0"/>
+              <a:t> </a:t>
+            </a:r>
+            <a:r>
+              <a:rPr lang="en-US" dirty="0" err="1" smtClean="0"/>
+              <a:t>virtualenvs.in</a:t>
+            </a:r>
+            <a:r>
+              <a:rPr lang="en-US" dirty="0" smtClean="0"/>
+              <a:t>-project true </a:t>
+            </a:r>
+            <a:r>
+              <a:rPr lang="el-GR" dirty="0" smtClean="0"/>
+              <a:t>για να τρέξει μόνο μέσα στο </a:t>
+            </a:r>
+            <a:r>
+              <a:rPr lang="en-US" dirty="0" smtClean="0"/>
+              <a:t>project folder</a:t>
+            </a:r>
+            <a:endParaRPr lang="el-GR" dirty="0"/>
+          </a:p>
+        </p:txBody>
+      </p:sp>
+    </p:spTree>
+  </p:cSld>
+  <p:clrMapOvr>
+    <a:masterClrMapping/>
+  </p:clrMapOvr>
+</p:sld>
+</file>
+
+<file path=ppt/slides/slide18.xml><?xml version="1.0" encoding="utf-8"?>
 <p:sld xmlns:a="http://schemas.openxmlformats.org/drawingml/2006/main" xmlns:r="http://schemas.openxmlformats.org/officeDocument/2006/relationships" xmlns:p="http://schemas.openxmlformats.org/presentationml/2006/main">
   <p:cSld>
     <p:spTree>
@@ -4130,188 +4287,6 @@
 </p:sld>
 </file>
 
-<file path=ppt/slides/slide18.xml><?xml version="1.0" encoding="utf-8"?>
-<p:sld xmlns:a="http://schemas.openxmlformats.org/drawingml/2006/main" xmlns:r="http://schemas.openxmlformats.org/officeDocument/2006/relationships" xmlns:p="http://schemas.openxmlformats.org/presentationml/2006/main">
-  <p:cSld>
-    <p:spTree>
-      <p:nvGrpSpPr>
-        <p:cNvPr id="1" name=""/>
-        <p:cNvGrpSpPr/>
-        <p:nvPr/>
-      </p:nvGrpSpPr>
-      <p:grpSpPr>
-        <a:xfrm>
-          <a:off x="0" y="0"/>
-          <a:ext cx="0" cy="0"/>
-          <a:chOff x="0" y="0"/>
-          <a:chExt cx="0" cy="0"/>
-        </a:xfrm>
-      </p:grpSpPr>
-      <p:sp>
-        <p:nvSpPr>
-          <p:cNvPr id="2" name="1 - Τίτλος"/>
-          <p:cNvSpPr>
-            <a:spLocks noGrp="1"/>
-          </p:cNvSpPr>
-          <p:nvPr>
-            <p:ph type="title"/>
-          </p:nvPr>
-        </p:nvSpPr>
-        <p:spPr/>
-        <p:txBody>
-          <a:bodyPr/>
-          <a:lstStyle/>
-          <a:p>
-            <a:r>
-              <a:rPr lang="el-GR" dirty="0" smtClean="0"/>
-              <a:t>Περιγραφή </a:t>
-            </a:r>
-            <a:r>
-              <a:rPr lang="en-US" dirty="0" smtClean="0"/>
-              <a:t>Software</a:t>
-            </a:r>
-            <a:r>
-              <a:rPr lang="el-GR" dirty="0" smtClean="0"/>
-              <a:t> </a:t>
-            </a:r>
-            <a:r>
-              <a:rPr lang="en-US" dirty="0" smtClean="0"/>
-              <a:t>Raspberry (3)</a:t>
-            </a:r>
-            <a:endParaRPr lang="el-GR" dirty="0"/>
-          </a:p>
-        </p:txBody>
-      </p:sp>
-      <p:sp>
-        <p:nvSpPr>
-          <p:cNvPr id="3" name="2 - Θέση περιεχομένου"/>
-          <p:cNvSpPr>
-            <a:spLocks noGrp="1"/>
-          </p:cNvSpPr>
-          <p:nvPr>
-            <p:ph idx="1"/>
-          </p:nvPr>
-        </p:nvSpPr>
-        <p:spPr/>
-        <p:txBody>
-          <a:bodyPr>
-            <a:normAutofit fontScale="92500" lnSpcReduction="20000"/>
-          </a:bodyPr>
-          <a:lstStyle/>
-          <a:p>
-            <a:pPr>
-              <a:buNone/>
-            </a:pPr>
-            <a:r>
-              <a:rPr lang="el-GR" dirty="0" smtClean="0"/>
-              <a:t>Τελικά το θα έχουμε βάλει στο </a:t>
-            </a:r>
-            <a:r>
-              <a:rPr lang="de-DE" dirty="0" smtClean="0"/>
-              <a:t>p</a:t>
-            </a:r>
-            <a:r>
-              <a:rPr lang="en-US" dirty="0" err="1" smtClean="0"/>
-              <a:t>yproject.toml</a:t>
-            </a:r>
-            <a:r>
-              <a:rPr lang="en-US" dirty="0" smtClean="0"/>
-              <a:t>:</a:t>
-            </a:r>
-          </a:p>
-          <a:p>
-            <a:r>
-              <a:rPr lang="en-US" dirty="0" smtClean="0"/>
-              <a:t>#python add </a:t>
-            </a:r>
-            <a:r>
-              <a:rPr lang="en-US" dirty="0" err="1" smtClean="0"/>
-              <a:t>pyyaml</a:t>
-            </a:r>
-            <a:endParaRPr lang="en-US" dirty="0" smtClean="0"/>
-          </a:p>
-          <a:p>
-            <a:r>
-              <a:rPr lang="en-US" dirty="0" smtClean="0"/>
-              <a:t>#poetry add python-</a:t>
-            </a:r>
-            <a:r>
-              <a:rPr lang="en-US" dirty="0" err="1" smtClean="0"/>
-              <a:t>dotenv</a:t>
-            </a:r>
-            <a:endParaRPr lang="en-US" dirty="0" smtClean="0"/>
-          </a:p>
-          <a:p>
-            <a:r>
-              <a:rPr lang="en-US" dirty="0" smtClean="0"/>
-              <a:t>#poetry add </a:t>
-            </a:r>
-            <a:r>
-              <a:rPr lang="en-US" dirty="0" err="1" smtClean="0"/>
-              <a:t>numpy</a:t>
-            </a:r>
-            <a:endParaRPr lang="en-US" dirty="0" smtClean="0"/>
-          </a:p>
-          <a:p>
-            <a:r>
-              <a:rPr lang="en-US" dirty="0" smtClean="0"/>
-              <a:t>#poetry add requests</a:t>
-            </a:r>
-          </a:p>
-          <a:p>
-            <a:r>
-              <a:rPr lang="en-US" dirty="0" smtClean="0"/>
-              <a:t>#poetry add </a:t>
-            </a:r>
-            <a:r>
-              <a:rPr lang="en-US" dirty="0" err="1" smtClean="0"/>
-              <a:t>pyserial</a:t>
-            </a:r>
-            <a:endParaRPr lang="en-US" dirty="0" smtClean="0"/>
-          </a:p>
-          <a:p>
-            <a:r>
-              <a:rPr lang="en-US" dirty="0" smtClean="0"/>
-              <a:t>#poetry add </a:t>
-            </a:r>
-            <a:r>
-              <a:rPr lang="en-US" dirty="0" err="1" smtClean="0"/>
-              <a:t>matplotlib</a:t>
-            </a:r>
-            <a:endParaRPr lang="en-US" dirty="0" smtClean="0"/>
-          </a:p>
-          <a:p>
-            <a:r>
-              <a:rPr lang="en-US" dirty="0" smtClean="0"/>
-              <a:t>#poetry add </a:t>
-            </a:r>
-            <a:r>
-              <a:rPr lang="en-US" dirty="0" err="1" smtClean="0"/>
-              <a:t>scipy</a:t>
-            </a:r>
-            <a:endParaRPr lang="en-US" dirty="0" smtClean="0"/>
-          </a:p>
-          <a:p>
-            <a:r>
-              <a:rPr lang="en-US" dirty="0" smtClean="0"/>
-              <a:t>#poetry add </a:t>
-            </a:r>
-            <a:r>
-              <a:rPr lang="en-US" dirty="0" err="1" smtClean="0"/>
-              <a:t>tzdata</a:t>
-            </a:r>
-            <a:endParaRPr lang="el-GR" dirty="0"/>
-          </a:p>
-        </p:txBody>
-      </p:sp>
-    </p:spTree>
-  </p:cSld>
-  <p:clrMapOvr>
-    <a:masterClrMapping/>
-  </p:clrMapOvr>
-</p:sld>
-</file>
-
 <file path=ppt/slides/slide19.xml><?xml version="1.0" encoding="utf-8"?>
 <p:sld xmlns:a="http://schemas.openxmlformats.org/drawingml/2006/main" xmlns:r="http://schemas.openxmlformats.org/officeDocument/2006/relationships" xmlns:p="http://schemas.openxmlformats.org/presentationml/2006/main">
   <p:cSld>
@@ -4346,7 +4321,19 @@
           <a:p>
             <a:r>
               <a:rPr lang="el-GR" dirty="0" smtClean="0"/>
-              <a:t>Παρατηρήσεις</a:t>
+              <a:t>Περιγραφή </a:t>
+            </a:r>
+            <a:r>
+              <a:rPr lang="en-US" dirty="0" smtClean="0"/>
+              <a:t>Software</a:t>
+            </a:r>
+            <a:r>
+              <a:rPr lang="el-GR" dirty="0" smtClean="0"/>
+              <a:t> </a:t>
+            </a:r>
+            <a:r>
+              <a:rPr lang="en-US" dirty="0" smtClean="0"/>
+              <a:t>Raspberry (3)</a:t>
             </a:r>
             <a:endParaRPr lang="el-GR" dirty="0"/>
           </a:p>
@@ -4365,218 +4352,111 @@
         <p:spPr/>
         <p:txBody>
           <a:bodyPr>
-            <a:normAutofit fontScale="55000" lnSpcReduction="20000"/>
+            <a:normAutofit fontScale="92500" lnSpcReduction="20000"/>
           </a:bodyPr>
           <a:lstStyle/>
           <a:p>
-            <a:r>
-              <a:rPr lang="el-GR" dirty="0" smtClean="0"/>
-              <a:t>Στο </a:t>
+            <a:pPr>
+              <a:buNone/>
+            </a:pPr>
+            <a:r>
+              <a:rPr lang="el-GR" dirty="0" smtClean="0"/>
+              <a:t>Τελικά το θα έχουμε βάλει στο </a:t>
             </a:r>
             <a:r>
               <a:rPr lang="de-DE" dirty="0" smtClean="0"/>
-              <a:t>ras</a:t>
+              <a:t>p</a:t>
             </a:r>
             <a:r>
               <a:rPr lang="en-US" dirty="0" err="1" smtClean="0"/>
-              <a:t>pberry</a:t>
-            </a:r>
-            <a:r>
-              <a:rPr lang="en-US" dirty="0" smtClean="0"/>
-              <a:t> </a:t>
-            </a:r>
-            <a:r>
-              <a:rPr lang="el-GR" dirty="0" smtClean="0"/>
-              <a:t>χρειάστηκε να αλλάξω το </a:t>
-            </a:r>
-            <a:r>
-              <a:rPr lang="en-US" dirty="0" smtClean="0"/>
-              <a:t>reference path PYTHONPATH=/home/VASILIS/repos/Vibration-Analysis-Project/raspberry poetry run python3.12 tests/test_methods.py</a:t>
-            </a:r>
-            <a:endParaRPr lang="el-GR" dirty="0" smtClean="0"/>
-          </a:p>
-          <a:p>
-            <a:r>
-              <a:rPr lang="el-GR" dirty="0" smtClean="0"/>
-              <a:t>Η εναλλακτικά τρέχουμε ακολουθία εντολών: </a:t>
-            </a:r>
-          </a:p>
-          <a:p>
-            <a:pPr lvl="1"/>
-            <a:r>
-              <a:rPr lang="en-US" dirty="0" smtClean="0"/>
-              <a:t>export PATH="$HOME/.local/bin:$PATH"</a:t>
-            </a:r>
-          </a:p>
-          <a:p>
-            <a:pPr lvl="1"/>
-            <a:r>
-              <a:rPr lang="en-US" dirty="0" smtClean="0"/>
-              <a:t>source $(poetry </a:t>
+              <a:t>yproject.toml</a:t>
+            </a:r>
+            <a:r>
+              <a:rPr lang="en-US" dirty="0" smtClean="0"/>
+              <a:t>:</a:t>
+            </a:r>
+          </a:p>
+          <a:p>
+            <a:r>
+              <a:rPr lang="en-US" dirty="0" smtClean="0"/>
+              <a:t>#python add </a:t>
             </a:r>
             <a:r>
               <a:rPr lang="en-US" dirty="0" err="1" smtClean="0"/>
-              <a:t>env</a:t>
-            </a:r>
-            <a:r>
-              <a:rPr lang="en-US" dirty="0" smtClean="0"/>
-              <a:t> info --path)/bin/activate</a:t>
-            </a:r>
-          </a:p>
-          <a:p>
-            <a:pPr lvl="1"/>
-            <a:r>
-              <a:rPr lang="en-US" dirty="0" smtClean="0"/>
-              <a:t>poetry run python -m </a:t>
+              <a:t>pyyaml</a:t>
+            </a:r>
+            <a:endParaRPr lang="en-US" dirty="0" smtClean="0"/>
+          </a:p>
+          <a:p>
+            <a:r>
+              <a:rPr lang="en-US" dirty="0" smtClean="0"/>
+              <a:t>#poetry add python-</a:t>
             </a:r>
             <a:r>
               <a:rPr lang="en-US" dirty="0" err="1" smtClean="0"/>
-              <a:t>testing.test_methods</a:t>
+              <a:t>dotenv</a:t>
             </a:r>
             <a:endParaRPr lang="en-US" dirty="0" smtClean="0"/>
           </a:p>
           <a:p>
             <a:r>
-              <a:rPr lang="el-GR" dirty="0" smtClean="0"/>
-              <a:t>Για </a:t>
-            </a:r>
-            <a:r>
-              <a:rPr lang="de-DE" dirty="0" err="1" smtClean="0"/>
-              <a:t>debugging</a:t>
-            </a:r>
-            <a:r>
-              <a:rPr lang="de-DE" dirty="0" smtClean="0"/>
-              <a:t> </a:t>
-            </a:r>
-            <a:r>
-              <a:rPr lang="el-GR" dirty="0" smtClean="0"/>
-              <a:t>μπορώ να τρέξω για παράδειγμα </a:t>
-            </a:r>
-            <a:r>
-              <a:rPr lang="en-US" dirty="0" smtClean="0"/>
-              <a:t>poetry run python -c "from </a:t>
+              <a:rPr lang="en-US" dirty="0" smtClean="0"/>
+              <a:t>#poetry add </a:t>
             </a:r>
             <a:r>
               <a:rPr lang="en-US" dirty="0" err="1" smtClean="0"/>
-              <a:t>sourceCode.utils</a:t>
-            </a:r>
-            <a:r>
-              <a:rPr lang="en-US" dirty="0" smtClean="0"/>
-              <a:t> import </a:t>
+              <a:t>numpy</a:t>
+            </a:r>
+            <a:endParaRPr lang="en-US" dirty="0" smtClean="0"/>
+          </a:p>
+          <a:p>
+            <a:r>
+              <a:rPr lang="en-US" dirty="0" smtClean="0"/>
+              <a:t>#poetry add requests</a:t>
+            </a:r>
+          </a:p>
+          <a:p>
+            <a:r>
+              <a:rPr lang="en-US" dirty="0" smtClean="0"/>
+              <a:t>#poetry add </a:t>
             </a:r>
             <a:r>
               <a:rPr lang="en-US" dirty="0" err="1" smtClean="0"/>
-              <a:t>load_config</a:t>
-            </a:r>
-            <a:r>
-              <a:rPr lang="en-US" dirty="0" smtClean="0"/>
-              <a:t>; print(</a:t>
+              <a:t>pyserial</a:t>
+            </a:r>
+            <a:endParaRPr lang="en-US" dirty="0" smtClean="0"/>
+          </a:p>
+          <a:p>
+            <a:r>
+              <a:rPr lang="en-US" dirty="0" smtClean="0"/>
+              <a:t>#poetry add </a:t>
             </a:r>
             <a:r>
               <a:rPr lang="en-US" dirty="0" err="1" smtClean="0"/>
-              <a:t>load_config</a:t>
-            </a:r>
-            <a:r>
-              <a:rPr lang="en-US" dirty="0" smtClean="0"/>
-              <a:t>())"</a:t>
-            </a:r>
-          </a:p>
-          <a:p>
-            <a:r>
-              <a:rPr lang="el-GR" dirty="0" smtClean="0"/>
-              <a:t>Για να τρέξω το </a:t>
-            </a:r>
-            <a:r>
-              <a:rPr lang="de-DE" dirty="0" err="1" smtClean="0"/>
-              <a:t>test</a:t>
-            </a:r>
-            <a:r>
-              <a:rPr lang="de-DE" dirty="0" smtClean="0"/>
-              <a:t> </a:t>
-            </a:r>
-            <a:r>
-              <a:rPr lang="el-GR" dirty="0" smtClean="0"/>
-              <a:t>αρχείο </a:t>
-            </a:r>
-            <a:r>
-              <a:rPr lang="en-US" dirty="0" smtClean="0"/>
-              <a:t>poetry run python -m </a:t>
+              <a:t>matplotlib</a:t>
+            </a:r>
+            <a:endParaRPr lang="en-US" dirty="0" smtClean="0"/>
+          </a:p>
+          <a:p>
+            <a:r>
+              <a:rPr lang="en-US" dirty="0" smtClean="0"/>
+              <a:t>#poetry add </a:t>
             </a:r>
             <a:r>
               <a:rPr lang="en-US" dirty="0" err="1" smtClean="0"/>
-              <a:t>testing.test_methods</a:t>
-            </a:r>
-            <a:r>
-              <a:rPr lang="en-US" dirty="0" smtClean="0"/>
-              <a:t> (treating the file as a part of module system)</a:t>
-            </a:r>
-          </a:p>
-          <a:p>
-            <a:r>
-              <a:rPr lang="el-GR" dirty="0" smtClean="0"/>
-              <a:t>Στο </a:t>
-            </a:r>
-            <a:r>
-              <a:rPr lang="de-DE" dirty="0" smtClean="0"/>
-              <a:t>.</a:t>
-            </a:r>
-            <a:r>
-              <a:rPr lang="de-DE" dirty="0" err="1" smtClean="0"/>
-              <a:t>env</a:t>
-            </a:r>
-            <a:r>
-              <a:rPr lang="de-DE" dirty="0" smtClean="0"/>
-              <a:t> </a:t>
-            </a:r>
-            <a:r>
-              <a:rPr lang="el-GR" dirty="0" smtClean="0"/>
-              <a:t>αρχείο </a:t>
-            </a:r>
-            <a:r>
-              <a:rPr lang="el-GR" dirty="0" err="1" smtClean="0"/>
-              <a:t>αποθηκέυουμε</a:t>
-            </a:r>
-            <a:r>
-              <a:rPr lang="el-GR" dirty="0" smtClean="0"/>
-              <a:t> τις σημαντικές μεταβλητές που αφορούν στο </a:t>
-            </a:r>
-            <a:r>
-              <a:rPr lang="de-DE" dirty="0" err="1" smtClean="0"/>
-              <a:t>api</a:t>
-            </a:r>
-            <a:r>
-              <a:rPr lang="de-DE" dirty="0" smtClean="0"/>
-              <a:t> </a:t>
-            </a:r>
-            <a:r>
-              <a:rPr lang="el-GR" dirty="0" smtClean="0"/>
-              <a:t>του πίνακα της βάσης δεδομένων στην </a:t>
-            </a:r>
-            <a:r>
-              <a:rPr lang="de-DE" dirty="0" err="1" smtClean="0"/>
-              <a:t>supabase</a:t>
+              <a:t>scipy</a:t>
             </a:r>
             <a:endParaRPr lang="en-US" dirty="0" smtClean="0"/>
           </a:p>
           <a:p>
-            <a:pPr lvl="1"/>
-            <a:r>
-              <a:rPr lang="en-US" dirty="0" smtClean="0"/>
-              <a:t>SUPABASE_URL="https://iftqwletgmtvtymsktar.supabase.co/rest/v1/measurements"</a:t>
-            </a:r>
-          </a:p>
-          <a:p>
-            <a:pPr lvl="1"/>
-            <a:r>
-              <a:rPr lang="en-US" dirty="0" smtClean="0"/>
-              <a:t>API_KEY=“…..”</a:t>
-            </a:r>
-            <a:br>
-              <a:rPr lang="en-US" dirty="0" smtClean="0"/>
-            </a:br>
-            <a:endParaRPr lang="en-US" dirty="0" smtClean="0"/>
-          </a:p>
-          <a:p>
+            <a:r>
+              <a:rPr lang="en-US" dirty="0" smtClean="0"/>
+              <a:t>#poetry add </a:t>
+            </a:r>
+            <a:r>
+              <a:rPr lang="en-US" dirty="0" err="1" smtClean="0"/>
+              <a:t>tzdata</a:t>
+            </a:r>
             <a:endParaRPr lang="el-GR" dirty="0"/>
           </a:p>
         </p:txBody>
@@ -4719,280 +4599,240 @@
         </p:nvSpPr>
         <p:spPr/>
         <p:txBody>
+          <a:bodyPr/>
+          <a:lstStyle/>
+          <a:p>
+            <a:r>
+              <a:rPr lang="el-GR" dirty="0" smtClean="0"/>
+              <a:t>Παρατηρήσεις</a:t>
+            </a:r>
+            <a:endParaRPr lang="el-GR" dirty="0"/>
+          </a:p>
+        </p:txBody>
+      </p:sp>
+      <p:sp>
+        <p:nvSpPr>
+          <p:cNvPr id="3" name="2 - Θέση περιεχομένου"/>
+          <p:cNvSpPr>
+            <a:spLocks noGrp="1"/>
+          </p:cNvSpPr>
+          <p:nvPr>
+            <p:ph idx="1"/>
+          </p:nvPr>
+        </p:nvSpPr>
+        <p:spPr/>
+        <p:txBody>
           <a:bodyPr>
-            <a:normAutofit fontScale="90000"/>
+            <a:normAutofit fontScale="55000" lnSpcReduction="20000"/>
           </a:bodyPr>
           <a:lstStyle/>
           <a:p>
             <a:r>
               <a:rPr lang="el-GR" dirty="0" smtClean="0"/>
-              <a:t>Περιγραφή αρχείων </a:t>
+              <a:t>Στο </a:t>
+            </a:r>
+            <a:r>
+              <a:rPr lang="de-DE" dirty="0" smtClean="0"/>
+              <a:t>ras</a:t>
+            </a:r>
+            <a:r>
+              <a:rPr lang="en-US" dirty="0" err="1" smtClean="0"/>
+              <a:t>pberry</a:t>
+            </a:r>
+            <a:r>
+              <a:rPr lang="en-US" dirty="0" smtClean="0"/>
+              <a:t> </a:t>
+            </a:r>
+            <a:r>
+              <a:rPr lang="el-GR" dirty="0" smtClean="0"/>
+              <a:t>χρειάστηκε να αλλάξω το </a:t>
+            </a:r>
+            <a:r>
+              <a:rPr lang="en-US" dirty="0" smtClean="0"/>
+              <a:t>reference path PYTHONPATH=/home/VASILIS/repos/Vibration-Analysis-Project/raspberry poetry run python3.12 tests/test_methods.py</a:t>
+            </a:r>
+            <a:endParaRPr lang="el-GR" dirty="0" smtClean="0"/>
+          </a:p>
+          <a:p>
+            <a:r>
+              <a:rPr lang="el-GR" dirty="0" smtClean="0"/>
+              <a:t>Η εναλλακτικά τρέχουμε ακολουθία εντολών: </a:t>
+            </a:r>
+          </a:p>
+          <a:p>
+            <a:pPr lvl="1"/>
+            <a:r>
+              <a:rPr lang="en-US" dirty="0" smtClean="0"/>
+              <a:t>export PATH="$HOME/.local/bin:$PATH"</a:t>
+            </a:r>
+          </a:p>
+          <a:p>
+            <a:pPr lvl="1"/>
+            <a:r>
+              <a:rPr lang="en-US" dirty="0" smtClean="0"/>
+              <a:t>source $(poetry </a:t>
+            </a:r>
+            <a:r>
+              <a:rPr lang="en-US" dirty="0" err="1" smtClean="0"/>
+              <a:t>env</a:t>
+            </a:r>
+            <a:r>
+              <a:rPr lang="en-US" dirty="0" smtClean="0"/>
+              <a:t> info --path)/bin/activate</a:t>
+            </a:r>
+          </a:p>
+          <a:p>
+            <a:pPr lvl="1"/>
+            <a:r>
+              <a:rPr lang="en-US" dirty="0" smtClean="0"/>
+              <a:t>poetry run python -m </a:t>
+            </a:r>
+            <a:r>
+              <a:rPr lang="en-US" dirty="0" err="1" smtClean="0"/>
+              <a:t>testing.test_methods</a:t>
+            </a:r>
+            <a:endParaRPr lang="en-US" dirty="0" smtClean="0"/>
+          </a:p>
+          <a:p>
+            <a:r>
+              <a:rPr lang="el-GR" dirty="0" smtClean="0"/>
+              <a:t>Για </a:t>
             </a:r>
             <a:r>
               <a:rPr lang="de-DE" dirty="0" err="1" smtClean="0"/>
-              <a:t>source</a:t>
+              <a:t>debugging</a:t>
             </a:r>
             <a:r>
               <a:rPr lang="de-DE" dirty="0" smtClean="0"/>
               <a:t> </a:t>
             </a:r>
             <a:r>
+              <a:rPr lang="el-GR" dirty="0" smtClean="0"/>
+              <a:t>μπορώ να τρέξω για παράδειγμα </a:t>
+            </a:r>
+            <a:r>
+              <a:rPr lang="en-US" dirty="0" smtClean="0"/>
+              <a:t>poetry run python -c "from </a:t>
+            </a:r>
+            <a:r>
+              <a:rPr lang="en-US" dirty="0" err="1" smtClean="0"/>
+              <a:t>sourceCode.utils</a:t>
+            </a:r>
+            <a:r>
+              <a:rPr lang="en-US" dirty="0" smtClean="0"/>
+              <a:t> import </a:t>
+            </a:r>
+            <a:r>
+              <a:rPr lang="en-US" dirty="0" err="1" smtClean="0"/>
+              <a:t>load_config</a:t>
+            </a:r>
+            <a:r>
+              <a:rPr lang="en-US" dirty="0" smtClean="0"/>
+              <a:t>; print(</a:t>
+            </a:r>
+            <a:r>
+              <a:rPr lang="en-US" dirty="0" err="1" smtClean="0"/>
+              <a:t>load_config</a:t>
+            </a:r>
+            <a:r>
+              <a:rPr lang="en-US" dirty="0" smtClean="0"/>
+              <a:t>())"</a:t>
+            </a:r>
+          </a:p>
+          <a:p>
+            <a:r>
+              <a:rPr lang="el-GR" dirty="0" smtClean="0"/>
+              <a:t>Για να τρέξω το </a:t>
+            </a:r>
+            <a:r>
               <a:rPr lang="de-DE" dirty="0" err="1" smtClean="0"/>
-              <a:t>code</a:t>
-            </a:r>
-            <a:r>
-              <a:rPr lang="el-GR" dirty="0" smtClean="0"/>
-              <a:t> (1)</a:t>
-            </a:r>
-            <a:endParaRPr lang="el-GR" dirty="0"/>
-          </a:p>
-        </p:txBody>
-      </p:sp>
-      <p:sp>
-        <p:nvSpPr>
-          <p:cNvPr id="3" name="2 - Θέση περιεχομένου"/>
-          <p:cNvSpPr>
-            <a:spLocks noGrp="1"/>
-          </p:cNvSpPr>
-          <p:nvPr>
-            <p:ph idx="1"/>
-          </p:nvPr>
-        </p:nvSpPr>
-        <p:spPr/>
-        <p:txBody>
-          <a:bodyPr>
-            <a:normAutofit fontScale="62500" lnSpcReduction="20000"/>
-          </a:bodyPr>
-          <a:lstStyle/>
-          <a:p>
-            <a:pPr>
-              <a:buNone/>
-            </a:pPr>
-            <a:r>
-              <a:rPr lang="en-US" dirty="0" smtClean="0"/>
-              <a:t>API.py</a:t>
-            </a:r>
-            <a:r>
-              <a:rPr lang="el-GR" dirty="0" smtClean="0"/>
-              <a:t>:</a:t>
-            </a:r>
-          </a:p>
-          <a:p>
-            <a:r>
-              <a:rPr lang="el-GR" b="1" dirty="0" smtClean="0"/>
-              <a:t>Φορτώνει τη ρύθμιση της εφαρμογής</a:t>
-            </a:r>
-            <a:r>
-              <a:rPr lang="el-GR" dirty="0" smtClean="0"/>
-              <a:t>: Χρησιμοποιεί τη συνάρτηση </a:t>
-            </a:r>
-            <a:r>
-              <a:rPr lang="el-GR" dirty="0" err="1" smtClean="0"/>
-              <a:t>load_config</a:t>
-            </a:r>
-            <a:r>
-              <a:rPr lang="el-GR" dirty="0" smtClean="0"/>
-              <a:t> για να φορτώσει τη ρύθμιση της εφαρμογής (π.χ. API </a:t>
-            </a:r>
-            <a:r>
-              <a:rPr lang="el-GR" dirty="0" err="1" smtClean="0"/>
-              <a:t>key</a:t>
-            </a:r>
-            <a:r>
-              <a:rPr lang="el-GR" dirty="0" smtClean="0"/>
-              <a:t> και </a:t>
-            </a:r>
-            <a:r>
-              <a:rPr lang="el-GR" dirty="0" err="1" smtClean="0"/>
-              <a:t>Supabase</a:t>
-            </a:r>
-            <a:r>
-              <a:rPr lang="el-GR" dirty="0" smtClean="0"/>
-              <a:t> URL</a:t>
-            </a:r>
-            <a:r>
-              <a:rPr lang="en-US" dirty="0" smtClean="0"/>
-              <a:t>s –</a:t>
-            </a:r>
-            <a:r>
-              <a:rPr lang="el-GR" dirty="0" smtClean="0"/>
-              <a:t> ένα για </a:t>
-            </a:r>
-            <a:r>
-              <a:rPr lang="en-US" dirty="0" smtClean="0"/>
-              <a:t>selecting </a:t>
-            </a:r>
-            <a:r>
-              <a:rPr lang="el-GR" dirty="0" smtClean="0"/>
-              <a:t>και ένα για </a:t>
-            </a:r>
-            <a:r>
-              <a:rPr lang="en-US" dirty="0" smtClean="0"/>
-              <a:t>posting</a:t>
-            </a:r>
-            <a:r>
-              <a:rPr lang="el-GR" dirty="0" smtClean="0"/>
-              <a:t>).</a:t>
-            </a:r>
-          </a:p>
-          <a:p>
-            <a:r>
-              <a:rPr lang="el-GR" b="1" dirty="0" smtClean="0"/>
-              <a:t>Αρχικοποιεί την κλάση </a:t>
-            </a:r>
-            <a:r>
-              <a:rPr lang="el-GR" b="1" dirty="0" err="1" smtClean="0"/>
-              <a:t>VibrationMonitoringAPI</a:t>
-            </a:r>
-            <a:r>
-              <a:rPr lang="el-GR" dirty="0" smtClean="0"/>
-              <a:t>: Δημιουργεί ένα αντικείμενο για την επικοινωνία με το </a:t>
-            </a:r>
-            <a:r>
-              <a:rPr lang="el-GR" dirty="0" err="1" smtClean="0"/>
-              <a:t>Supabase</a:t>
-            </a:r>
-            <a:r>
-              <a:rPr lang="el-GR" dirty="0" smtClean="0"/>
-              <a:t> API.</a:t>
-            </a:r>
-          </a:p>
-          <a:p>
-            <a:r>
-              <a:rPr lang="el-GR" b="1" dirty="0" smtClean="0"/>
-              <a:t>Ελέγχει για την ύπαρξη του API </a:t>
-            </a:r>
-            <a:r>
-              <a:rPr lang="el-GR" b="1" dirty="0" err="1" smtClean="0"/>
-              <a:t>key</a:t>
-            </a:r>
-            <a:r>
-              <a:rPr lang="el-GR" b="1" dirty="0" smtClean="0"/>
-              <a:t> και του </a:t>
-            </a:r>
-            <a:r>
-              <a:rPr lang="el-GR" b="1" dirty="0" err="1" smtClean="0"/>
-              <a:t>Supabase</a:t>
-            </a:r>
-            <a:r>
-              <a:rPr lang="el-GR" b="1" dirty="0" smtClean="0"/>
-              <a:t> URL</a:t>
-            </a:r>
-            <a:r>
-              <a:rPr lang="el-GR" dirty="0" smtClean="0"/>
-              <a:t>: Αν λείπει κάποιο από αυτά, εμφανίζεται σφάλμα και διακόπτεται η εκτέλεση.</a:t>
-            </a:r>
-          </a:p>
-          <a:p>
-            <a:r>
-              <a:rPr lang="el-GR" b="1" dirty="0" smtClean="0"/>
-              <a:t>Φορτώνει επικεφαλίδες αιτήματος (</a:t>
-            </a:r>
-            <a:r>
-              <a:rPr lang="el-GR" b="1" dirty="0" err="1" smtClean="0"/>
-              <a:t>headers</a:t>
-            </a:r>
-            <a:r>
-              <a:rPr lang="el-GR" b="1" dirty="0" smtClean="0"/>
-              <a:t>)</a:t>
-            </a:r>
-            <a:r>
-              <a:rPr lang="el-GR" dirty="0" smtClean="0"/>
-              <a:t>: Χρησιμοποιεί το API </a:t>
-            </a:r>
-            <a:r>
-              <a:rPr lang="el-GR" dirty="0" err="1" smtClean="0"/>
-              <a:t>key</a:t>
-            </a:r>
-            <a:r>
-              <a:rPr lang="el-GR" dirty="0" smtClean="0"/>
-              <a:t> για να ρυθμίσει τις επικεφαλίδες του αιτήματος προς το </a:t>
-            </a:r>
-            <a:r>
-              <a:rPr lang="el-GR" dirty="0" err="1" smtClean="0"/>
-              <a:t>Supabase</a:t>
-            </a:r>
-            <a:r>
-              <a:rPr lang="el-GR" dirty="0" smtClean="0"/>
-              <a:t>.</a:t>
-            </a:r>
-          </a:p>
-          <a:p>
-            <a:r>
-              <a:rPr lang="el-GR" b="1" dirty="0" smtClean="0"/>
-              <a:t>Μορφοποιεί ημερομηνίες</a:t>
-            </a:r>
-            <a:r>
-              <a:rPr lang="el-GR" dirty="0" smtClean="0"/>
-              <a:t>: Η μέθοδος </a:t>
-            </a:r>
-            <a:r>
-              <a:rPr lang="el-GR" dirty="0" err="1" smtClean="0"/>
-              <a:t>get_time</a:t>
-            </a:r>
-            <a:r>
-              <a:rPr lang="el-GR" dirty="0" smtClean="0"/>
-              <a:t> μορφοποιεί τις ημερομηνίες </a:t>
-            </a:r>
-            <a:r>
-              <a:rPr lang="el-GR" dirty="0" err="1" smtClean="0"/>
-              <a:t>start_measurement</a:t>
-            </a:r>
-            <a:r>
-              <a:rPr lang="el-GR" dirty="0" smtClean="0"/>
-              <a:t> και </a:t>
-            </a:r>
-            <a:r>
-              <a:rPr lang="el-GR" dirty="0" err="1" smtClean="0"/>
-              <a:t>end_measurement</a:t>
-            </a:r>
-            <a:r>
-              <a:rPr lang="el-GR" dirty="0" smtClean="0"/>
-              <a:t> σε ISO 8601 μορφή.</a:t>
-            </a:r>
-          </a:p>
-          <a:p>
-            <a:r>
-              <a:rPr lang="el-GR" b="1" dirty="0" smtClean="0"/>
-              <a:t>Αποστολή δεδομένων μέτρησης</a:t>
-            </a:r>
-            <a:r>
-              <a:rPr lang="el-GR" dirty="0" smtClean="0"/>
-              <a:t>: Η μέθοδος </a:t>
-            </a:r>
-            <a:r>
-              <a:rPr lang="el-GR" dirty="0" err="1" smtClean="0"/>
-              <a:t>send_measurement</a:t>
-            </a:r>
-            <a:r>
-              <a:rPr lang="el-GR" dirty="0" smtClean="0"/>
-              <a:t> στέλνει τα δεδομένα μέτρησης στο </a:t>
-            </a:r>
-            <a:r>
-              <a:rPr lang="el-GR" dirty="0" err="1" smtClean="0"/>
-              <a:t>Supabase</a:t>
-            </a:r>
-            <a:r>
-              <a:rPr lang="el-GR" dirty="0" smtClean="0"/>
-              <a:t>, μέσω ενός HTTP POST αιτήματος</a:t>
+              <a:t>test</a:t>
             </a:r>
             <a:r>
               <a:rPr lang="de-DE" dirty="0" smtClean="0"/>
-              <a:t>, </a:t>
-            </a:r>
-            <a:r>
-              <a:rPr lang="el-GR" dirty="0" smtClean="0"/>
-              <a:t>δίχως να λαμβάνει </a:t>
-            </a:r>
-            <a:r>
-              <a:rPr lang="de-DE" dirty="0" err="1" smtClean="0"/>
-              <a:t>feedback</a:t>
+              <a:t> </a:t>
+            </a:r>
+            <a:r>
+              <a:rPr lang="el-GR" dirty="0" smtClean="0"/>
+              <a:t>αρχείο </a:t>
+            </a:r>
+            <a:r>
+              <a:rPr lang="en-US" dirty="0" smtClean="0"/>
+              <a:t>poetry run python -m </a:t>
+            </a:r>
+            <a:r>
+              <a:rPr lang="en-US" dirty="0" err="1" smtClean="0"/>
+              <a:t>testing.test_methods</a:t>
+            </a:r>
+            <a:r>
+              <a:rPr lang="en-US" dirty="0" smtClean="0"/>
+              <a:t> (treating the file as a part of module system)</a:t>
+            </a:r>
+          </a:p>
+          <a:p>
+            <a:r>
+              <a:rPr lang="el-GR" dirty="0" smtClean="0"/>
+              <a:t>Στο </a:t>
             </a:r>
             <a:r>
               <a:rPr lang="de-DE" dirty="0" smtClean="0"/>
               <a:t>.</a:t>
             </a:r>
-            <a:endParaRPr lang="el-GR" dirty="0" smtClean="0"/>
+            <a:r>
+              <a:rPr lang="de-DE" dirty="0" err="1" smtClean="0"/>
+              <a:t>env</a:t>
+            </a:r>
+            <a:r>
+              <a:rPr lang="de-DE" dirty="0" smtClean="0"/>
+              <a:t> </a:t>
+            </a:r>
+            <a:r>
+              <a:rPr lang="el-GR" dirty="0" smtClean="0"/>
+              <a:t>αρχείο </a:t>
+            </a:r>
+            <a:r>
+              <a:rPr lang="el-GR" dirty="0" err="1" smtClean="0"/>
+              <a:t>αποθηκέυουμε</a:t>
+            </a:r>
+            <a:r>
+              <a:rPr lang="el-GR" dirty="0" smtClean="0"/>
+              <a:t> τις σημαντικές μεταβλητές που αφορούν στο </a:t>
+            </a:r>
+            <a:r>
+              <a:rPr lang="de-DE" dirty="0" err="1" smtClean="0"/>
+              <a:t>api</a:t>
+            </a:r>
+            <a:r>
+              <a:rPr lang="de-DE" dirty="0" smtClean="0"/>
+              <a:t> </a:t>
+            </a:r>
+            <a:r>
+              <a:rPr lang="el-GR" dirty="0" smtClean="0"/>
+              <a:t>του πίνακα της βάσης δεδομένων στην </a:t>
+            </a:r>
+            <a:r>
+              <a:rPr lang="de-DE" dirty="0" err="1" smtClean="0"/>
+              <a:t>supabase</a:t>
+            </a:r>
+            <a:endParaRPr lang="en-US" dirty="0" smtClean="0"/>
+          </a:p>
+          <a:p>
+            <a:pPr lvl="1"/>
+            <a:r>
+              <a:rPr lang="en-US" dirty="0" smtClean="0"/>
+              <a:t>SUPABASE_URL="https://iftqwletgmtvtymsktar.supabase.co/rest/v1/measurements"</a:t>
+            </a:r>
+          </a:p>
+          <a:p>
+            <a:pPr lvl="1"/>
+            <a:r>
+              <a:rPr lang="en-US" dirty="0" smtClean="0"/>
+              <a:t>API_KEY=“…..”</a:t>
+            </a:r>
+            <a:br>
+              <a:rPr lang="en-US" dirty="0" smtClean="0"/>
+            </a:br>
+            <a:endParaRPr lang="en-US" dirty="0" smtClean="0"/>
           </a:p>
           <a:p>
             <a:endParaRPr lang="el-GR" dirty="0"/>
@@ -5059,15 +4899,7 @@
             </a:r>
             <a:r>
               <a:rPr lang="el-GR" dirty="0" smtClean="0"/>
-              <a:t> (</a:t>
-            </a:r>
-            <a:r>
-              <a:rPr lang="en-US" dirty="0" smtClean="0"/>
-              <a:t>2</a:t>
-            </a:r>
-            <a:r>
-              <a:rPr lang="el-GR" dirty="0" smtClean="0"/>
-              <a:t>)</a:t>
+              <a:t> (1)</a:t>
             </a:r>
             <a:endParaRPr lang="el-GR" dirty="0"/>
           </a:p>
@@ -5095,7 +4927,7 @@
             </a:pPr>
             <a:r>
               <a:rPr lang="en-US" dirty="0" smtClean="0"/>
-              <a:t>Utils.py</a:t>
+              <a:t>API.py</a:t>
             </a:r>
             <a:r>
               <a:rPr lang="el-GR" dirty="0" smtClean="0"/>
@@ -5105,11 +4937,117 @@
           <a:p>
             <a:r>
               <a:rPr lang="el-GR" b="1" dirty="0" smtClean="0"/>
-              <a:t>Ρύθμιση καταγραφής (</a:t>
+              <a:t>Φορτώνει τη ρύθμιση της εφαρμογής</a:t>
+            </a:r>
+            <a:r>
+              <a:rPr lang="el-GR" dirty="0" smtClean="0"/>
+              <a:t>: Χρησιμοποιεί τη συνάρτηση </a:t>
+            </a:r>
+            <a:r>
+              <a:rPr lang="el-GR" dirty="0" err="1" smtClean="0"/>
+              <a:t>load_config</a:t>
+            </a:r>
+            <a:r>
+              <a:rPr lang="el-GR" dirty="0" smtClean="0"/>
+              <a:t> για να φορτώσει τη ρύθμιση της εφαρμογής (π.χ. API </a:t>
+            </a:r>
+            <a:r>
+              <a:rPr lang="el-GR" dirty="0" err="1" smtClean="0"/>
+              <a:t>key</a:t>
+            </a:r>
+            <a:r>
+              <a:rPr lang="el-GR" dirty="0" smtClean="0"/>
+              <a:t> και </a:t>
+            </a:r>
+            <a:r>
+              <a:rPr lang="el-GR" dirty="0" err="1" smtClean="0"/>
+              <a:t>Supabase</a:t>
+            </a:r>
+            <a:r>
+              <a:rPr lang="el-GR" dirty="0" smtClean="0"/>
+              <a:t> URL</a:t>
+            </a:r>
+            <a:r>
+              <a:rPr lang="en-US" dirty="0" smtClean="0"/>
+              <a:t>s –</a:t>
+            </a:r>
+            <a:r>
+              <a:rPr lang="el-GR" dirty="0" smtClean="0"/>
+              <a:t> ένα για </a:t>
+            </a:r>
+            <a:r>
+              <a:rPr lang="en-US" dirty="0" smtClean="0"/>
+              <a:t>selecting </a:t>
+            </a:r>
+            <a:r>
+              <a:rPr lang="el-GR" dirty="0" smtClean="0"/>
+              <a:t>και ένα για </a:t>
+            </a:r>
+            <a:r>
+              <a:rPr lang="en-US" dirty="0" smtClean="0"/>
+              <a:t>posting</a:t>
+            </a:r>
+            <a:r>
+              <a:rPr lang="el-GR" dirty="0" smtClean="0"/>
+              <a:t>).</a:t>
+            </a:r>
+          </a:p>
+          <a:p>
+            <a:r>
+              <a:rPr lang="el-GR" b="1" dirty="0" smtClean="0"/>
+              <a:t>Αρχικοποιεί την κλάση </a:t>
             </a:r>
             <a:r>
               <a:rPr lang="el-GR" b="1" dirty="0" err="1" smtClean="0"/>
-              <a:t>Logging</a:t>
+              <a:t>VibrationMonitoringAPI</a:t>
+            </a:r>
+            <a:r>
+              <a:rPr lang="el-GR" dirty="0" smtClean="0"/>
+              <a:t>: Δημιουργεί ένα αντικείμενο για την επικοινωνία με το </a:t>
+            </a:r>
+            <a:r>
+              <a:rPr lang="el-GR" dirty="0" err="1" smtClean="0"/>
+              <a:t>Supabase</a:t>
+            </a:r>
+            <a:r>
+              <a:rPr lang="el-GR" dirty="0" smtClean="0"/>
+              <a:t> API.</a:t>
+            </a:r>
+          </a:p>
+          <a:p>
+            <a:r>
+              <a:rPr lang="el-GR" b="1" dirty="0" smtClean="0"/>
+              <a:t>Ελέγχει για την ύπαρξη του API </a:t>
+            </a:r>
+            <a:r>
+              <a:rPr lang="el-GR" b="1" dirty="0" err="1" smtClean="0"/>
+              <a:t>key</a:t>
+            </a:r>
+            <a:r>
+              <a:rPr lang="el-GR" b="1" dirty="0" smtClean="0"/>
+              <a:t> και του </a:t>
+            </a:r>
+            <a:r>
+              <a:rPr lang="el-GR" b="1" dirty="0" err="1" smtClean="0"/>
+              <a:t>Supabase</a:t>
+            </a:r>
+            <a:r>
+              <a:rPr lang="el-GR" b="1" dirty="0" smtClean="0"/>
+              <a:t> URL</a:t>
+            </a:r>
+            <a:r>
+              <a:rPr lang="el-GR" dirty="0" smtClean="0"/>
+              <a:t>: Αν λείπει κάποιο από αυτά, εμφανίζεται σφάλμα και διακόπτεται η εκτέλεση.</a:t>
+            </a:r>
+          </a:p>
+          <a:p>
+            <a:r>
+              <a:rPr lang="el-GR" b="1" dirty="0" smtClean="0"/>
+              <a:t>Φορτώνει επικεφαλίδες αιτήματος (</a:t>
+            </a:r>
+            <a:r>
+              <a:rPr lang="el-GR" b="1" dirty="0" err="1" smtClean="0"/>
+              <a:t>headers</a:t>
             </a:r>
             <a:r>
               <a:rPr lang="el-GR" b="1" dirty="0" smtClean="0"/>
@@ -5117,164 +5055,103 @@
             </a:r>
             <a:r>
               <a:rPr lang="el-GR" dirty="0" smtClean="0"/>
-              <a:t>: Ρυθμίζει την καταγραφή (</a:t>
+              <a:t>: Χρησιμοποιεί το API </a:t>
             </a:r>
             <a:r>
               <a:rPr lang="el-GR" dirty="0" err="1" smtClean="0"/>
-              <a:t>logging</a:t>
-            </a:r>
-            <a:r>
-              <a:rPr lang="el-GR" dirty="0" smtClean="0"/>
-              <a:t>) με χρονική σήμανση για τις εγγραφές των συμβάντων (INFO, ERROR, κλπ.).</a:t>
-            </a:r>
-          </a:p>
-          <a:p>
-            <a:r>
-              <a:rPr lang="el-GR" b="1" dirty="0" smtClean="0"/>
-              <a:t>Φόρτωση μεταβλητών περιβάλλοντος</a:t>
-            </a:r>
-            <a:r>
-              <a:rPr lang="el-GR" dirty="0" smtClean="0"/>
-              <a:t>: Η συνάρτηση </a:t>
-            </a:r>
-            <a:r>
-              <a:rPr lang="el-GR" dirty="0" err="1" smtClean="0"/>
-              <a:t>load_env_variables</a:t>
-            </a:r>
-            <a:r>
-              <a:rPr lang="el-GR" dirty="0" smtClean="0"/>
-              <a:t> φορτώνει τις μεταβλητές περιβάλλοντος από το αρχείο .</a:t>
-            </a:r>
-            <a:r>
-              <a:rPr lang="el-GR" dirty="0" err="1" smtClean="0"/>
-              <a:t>env</a:t>
-            </a:r>
-            <a:r>
-              <a:rPr lang="el-GR" dirty="0" smtClean="0"/>
-              <a:t> μέσω της βιβλιοθήκης </a:t>
-            </a:r>
-            <a:r>
-              <a:rPr lang="el-GR" dirty="0" err="1" smtClean="0"/>
-              <a:t>dotenv</a:t>
-            </a:r>
-            <a:r>
-              <a:rPr lang="el-GR" dirty="0" smtClean="0"/>
-              <a:t>.</a:t>
-            </a:r>
-          </a:p>
-          <a:p>
-            <a:r>
-              <a:rPr lang="el-GR" b="1" dirty="0" smtClean="0"/>
-              <a:t>Φόρτωση αρχείου ρύθμισης (</a:t>
-            </a:r>
-            <a:r>
-              <a:rPr lang="el-GR" b="1" dirty="0" err="1" smtClean="0"/>
-              <a:t>config</a:t>
-            </a:r>
-            <a:r>
-              <a:rPr lang="el-GR" b="1" dirty="0" smtClean="0"/>
-              <a:t>)</a:t>
-            </a:r>
-            <a:r>
-              <a:rPr lang="el-GR" dirty="0" smtClean="0"/>
-              <a:t>: Η συνάρτηση </a:t>
-            </a:r>
-            <a:r>
-              <a:rPr lang="el-GR" dirty="0" err="1" smtClean="0"/>
-              <a:t>load_config</a:t>
-            </a:r>
-            <a:r>
-              <a:rPr lang="el-GR" dirty="0" smtClean="0"/>
-              <a:t> φορτώνει τις ρυθμίσεις από ένα αρχείο YAML (προεπιλεγμένα από το αρχείο </a:t>
-            </a:r>
-            <a:r>
-              <a:rPr lang="el-GR" dirty="0" err="1" smtClean="0"/>
-              <a:t>config.yaml</a:t>
-            </a:r>
-            <a:r>
-              <a:rPr lang="el-GR" dirty="0" smtClean="0"/>
-              <a:t> στον φάκελο </a:t>
-            </a:r>
-            <a:r>
-              <a:rPr lang="el-GR" dirty="0" err="1" smtClean="0"/>
-              <a:t>config</a:t>
-            </a:r>
-            <a:r>
-              <a:rPr lang="el-GR" dirty="0" smtClean="0"/>
-              <a:t>). Αν το αρχείο δεν βρεθεί ή υπάρχει σφάλμα στην ανάλυση του YAML, εμφανίζεται το αντίστοιχο σφάλμα.</a:t>
-            </a:r>
-          </a:p>
-          <a:p>
-            <a:r>
-              <a:rPr lang="el-GR" b="1" dirty="0" smtClean="0"/>
-              <a:t>Ανάκτηση του API </a:t>
-            </a:r>
-            <a:r>
-              <a:rPr lang="el-GR" b="1" dirty="0" err="1" smtClean="0"/>
-              <a:t>Key</a:t>
-            </a:r>
-            <a:r>
-              <a:rPr lang="el-GR" dirty="0" smtClean="0"/>
-              <a:t>: Η συνάρτηση </a:t>
-            </a:r>
-            <a:r>
-              <a:rPr lang="el-GR" dirty="0" err="1" smtClean="0"/>
-              <a:t>get_api_key</a:t>
-            </a:r>
-            <a:r>
-              <a:rPr lang="el-GR" dirty="0" smtClean="0"/>
-              <a:t> ανακτά το API </a:t>
-            </a:r>
-            <a:r>
-              <a:rPr lang="el-GR" dirty="0" err="1" smtClean="0"/>
-              <a:t>Key</a:t>
-            </a:r>
-            <a:r>
-              <a:rPr lang="el-GR" dirty="0" smtClean="0"/>
-              <a:t> από τις μεταβλητές περιβάλλοντος.</a:t>
-            </a:r>
-          </a:p>
-          <a:p>
-            <a:r>
-              <a:rPr lang="el-GR" b="1" dirty="0" smtClean="0"/>
-              <a:t>Ανάκτηση του </a:t>
-            </a:r>
-            <a:r>
-              <a:rPr lang="el-GR" b="1" dirty="0" err="1" smtClean="0"/>
-              <a:t>Supabase</a:t>
-            </a:r>
-            <a:r>
-              <a:rPr lang="el-GR" b="1" dirty="0" smtClean="0"/>
-              <a:t> URL</a:t>
-            </a:r>
-            <a:r>
-              <a:rPr lang="el-GR" dirty="0" smtClean="0"/>
-              <a:t>: Η συνάρτηση </a:t>
-            </a:r>
-            <a:r>
-              <a:rPr lang="el-GR" dirty="0" err="1" smtClean="0"/>
-              <a:t>get_supabase_url</a:t>
-            </a:r>
-            <a:r>
-              <a:rPr lang="el-GR" dirty="0" smtClean="0"/>
-              <a:t> ανακτά το URL του </a:t>
+              <a:t>key</a:t>
+            </a:r>
+            <a:r>
+              <a:rPr lang="el-GR" dirty="0" smtClean="0"/>
+              <a:t> για να ρυθμίσει τις επικεφαλίδες του αιτήματος προς το </a:t>
             </a:r>
             <a:r>
               <a:rPr lang="el-GR" dirty="0" err="1" smtClean="0"/>
               <a:t>Supabase</a:t>
             </a:r>
             <a:r>
-              <a:rPr lang="en-US" dirty="0" smtClean="0"/>
-              <a:t> </a:t>
-            </a:r>
-            <a:r>
-              <a:rPr lang="el-GR" dirty="0" smtClean="0"/>
-              <a:t>από τις μεταβλητές περιβάλλοντος</a:t>
-            </a:r>
-            <a:r>
-              <a:rPr lang="en-US" dirty="0" smtClean="0"/>
+              <a:rPr lang="el-GR" dirty="0" smtClean="0"/>
               <a:t>.</a:t>
             </a:r>
+          </a:p>
+          <a:p>
+            <a:r>
+              <a:rPr lang="el-GR" b="1" dirty="0" smtClean="0"/>
+              <a:t>Μορφοποιεί ημερομηνίες</a:t>
+            </a:r>
+            <a:r>
+              <a:rPr lang="el-GR" dirty="0" smtClean="0"/>
+              <a:t>: Η μέθοδος </a:t>
+            </a:r>
+            <a:r>
+              <a:rPr lang="el-GR" dirty="0" err="1" smtClean="0"/>
+              <a:t>get_time</a:t>
+            </a:r>
+            <a:r>
+              <a:rPr lang="el-GR" dirty="0" smtClean="0"/>
+              <a:t> μορφοποιεί τις ημερομηνίες </a:t>
+            </a:r>
+            <a:r>
+              <a:rPr lang="el-GR" dirty="0" err="1" smtClean="0"/>
+              <a:t>start_measurement</a:t>
+            </a:r>
+            <a:r>
+              <a:rPr lang="el-GR" dirty="0" smtClean="0"/>
+              <a:t> και </a:t>
+            </a:r>
+            <a:r>
+              <a:rPr lang="el-GR" dirty="0" err="1" smtClean="0"/>
+              <a:t>end_measurement</a:t>
+            </a:r>
+            <a:r>
+              <a:rPr lang="el-GR" dirty="0" smtClean="0"/>
+              <a:t> σε ISO 8601 μορφή.</a:t>
+            </a:r>
+          </a:p>
+          <a:p>
+            <a:r>
+              <a:rPr lang="el-GR" b="1" dirty="0" smtClean="0"/>
+              <a:t>Αποστολή δεδομένων μέτρησης</a:t>
+            </a:r>
+            <a:r>
+              <a:rPr lang="el-GR" dirty="0" smtClean="0"/>
+              <a:t>: Η μέθοδος </a:t>
+            </a:r>
+            <a:r>
+              <a:rPr lang="el-GR" dirty="0" err="1" smtClean="0"/>
+              <a:t>send_measurement</a:t>
+            </a:r>
+            <a:r>
+              <a:rPr lang="el-GR" dirty="0" smtClean="0"/>
+              <a:t> στέλνει τα δεδομένα μέτρησης στο </a:t>
+            </a:r>
+            <a:r>
+              <a:rPr lang="el-GR" dirty="0" err="1" smtClean="0"/>
+              <a:t>Supabase</a:t>
+            </a:r>
+            <a:r>
+              <a:rPr lang="el-GR" dirty="0" smtClean="0"/>
+              <a:t>, μέσω ενός HTTP POST αιτήματος</a:t>
+            </a:r>
+            <a:r>
+              <a:rPr lang="de-DE" dirty="0" smtClean="0"/>
+              <a:t>, </a:t>
+            </a:r>
+            <a:r>
+              <a:rPr lang="el-GR" dirty="0" smtClean="0"/>
+              <a:t>δίχως να λαμβάνει </a:t>
+            </a:r>
+            <a:r>
+              <a:rPr lang="de-DE" dirty="0" err="1" smtClean="0"/>
+              <a:t>feedback</a:t>
+            </a:r>
+            <a:r>
+              <a:rPr lang="de-DE" dirty="0" smtClean="0"/>
+              <a:t>.</a:t>
+            </a:r>
+            <a:endParaRPr lang="el-GR" dirty="0" smtClean="0"/>
+          </a:p>
+          <a:p>
             <a:endParaRPr lang="el-GR" dirty="0"/>
           </a:p>
         </p:txBody>
@@ -5343,7 +5220,7 @@
             </a:r>
             <a:r>
               <a:rPr lang="en-US" dirty="0" smtClean="0"/>
-              <a:t>3</a:t>
+              <a:t>2</a:t>
             </a:r>
             <a:r>
               <a:rPr lang="el-GR" dirty="0" smtClean="0"/>
@@ -5366,7 +5243,7 @@
         <p:spPr/>
         <p:txBody>
           <a:bodyPr>
-            <a:normAutofit lnSpcReduction="10000"/>
+            <a:normAutofit fontScale="62500" lnSpcReduction="20000"/>
           </a:bodyPr>
           <a:lstStyle/>
           <a:p>
@@ -5375,7 +5252,7 @@
             </a:pPr>
             <a:r>
               <a:rPr lang="en-US" dirty="0" smtClean="0"/>
-              <a:t>Serial_communication.py</a:t>
+              <a:t>Utils.py</a:t>
             </a:r>
             <a:r>
               <a:rPr lang="el-GR" dirty="0" smtClean="0"/>
@@ -5385,76 +5262,176 @@
           <a:p>
             <a:r>
               <a:rPr lang="el-GR" b="1" dirty="0" smtClean="0"/>
-              <a:t>Δημιουργεί την σειριακή επικοινωνία: </a:t>
-            </a:r>
-            <a:r>
-              <a:rPr lang="el-GR" dirty="0" smtClean="0"/>
-              <a:t>μεταξύ του υπολογιστή</a:t>
-            </a:r>
-            <a:r>
-              <a:rPr lang="en-US" dirty="0" smtClean="0"/>
-              <a:t> (</a:t>
-            </a:r>
-            <a:r>
-              <a:rPr lang="el-GR" dirty="0" smtClean="0"/>
-              <a:t>στην </a:t>
-            </a:r>
-            <a:r>
-              <a:rPr lang="de-DE" dirty="0" err="1" smtClean="0"/>
-              <a:t>production</a:t>
-            </a:r>
-            <a:r>
-              <a:rPr lang="de-DE" dirty="0" smtClean="0"/>
+              <a:t>Ρύθμιση καταγραφής (</a:t>
+            </a:r>
+            <a:r>
+              <a:rPr lang="el-GR" b="1" dirty="0" err="1" smtClean="0"/>
+              <a:t>Logging</a:t>
+            </a:r>
+            <a:r>
+              <a:rPr lang="el-GR" b="1" dirty="0" smtClean="0"/>
+              <a:t>)</a:t>
+            </a:r>
+            <a:r>
+              <a:rPr lang="el-GR" dirty="0" smtClean="0"/>
+              <a:t>: Ρυθμίζει την καταγραφή (</a:t>
+            </a:r>
+            <a:r>
+              <a:rPr lang="el-GR" dirty="0" err="1" smtClean="0"/>
+              <a:t>logging</a:t>
+            </a:r>
+            <a:r>
+              <a:rPr lang="el-GR" dirty="0" smtClean="0"/>
+              <a:t>) με χρονική σήμανση για τις εγγραφές των συμβάντων (INFO, ERROR, κλπ.).</a:t>
+            </a:r>
+          </a:p>
+          <a:p>
+            <a:r>
+              <a:rPr lang="el-GR" b="1" dirty="0" smtClean="0"/>
+              <a:t>Φόρτωση μεταβλητών περιβάλλοντος</a:t>
+            </a:r>
+            <a:r>
+              <a:rPr lang="el-GR" dirty="0" smtClean="0"/>
+              <a:t>: Η συνάρτηση </a:t>
+            </a:r>
+            <a:r>
+              <a:rPr lang="el-GR" dirty="0" err="1" smtClean="0"/>
+              <a:t>load_env_variables</a:t>
+            </a:r>
+            <a:r>
+              <a:rPr lang="el-GR" dirty="0" smtClean="0"/>
+              <a:t> φορτώνει τις μεταβλητές περιβάλλοντος από το αρχείο .</a:t>
+            </a:r>
+            <a:r>
+              <a:rPr lang="el-GR" dirty="0" err="1" smtClean="0"/>
+              <a:t>env</a:t>
+            </a:r>
+            <a:r>
+              <a:rPr lang="el-GR" dirty="0" smtClean="0"/>
+              <a:t> μέσω της βιβλιοθήκης </a:t>
+            </a:r>
+            <a:r>
+              <a:rPr lang="el-GR" dirty="0" err="1" smtClean="0"/>
+              <a:t>dotenv</a:t>
+            </a:r>
+            <a:r>
+              <a:rPr lang="el-GR" dirty="0" smtClean="0"/>
+              <a:t>.</a:t>
+            </a:r>
+          </a:p>
+          <a:p>
+            <a:r>
+              <a:rPr lang="el-GR" b="1" dirty="0" smtClean="0"/>
+              <a:t>Φόρτωση αρχείου ρύθμισης (</a:t>
+            </a:r>
+            <a:r>
+              <a:rPr lang="el-GR" b="1" dirty="0" err="1" smtClean="0"/>
+              <a:t>config</a:t>
+            </a:r>
+            <a:r>
+              <a:rPr lang="el-GR" b="1" dirty="0" smtClean="0"/>
+              <a:t>)</a:t>
+            </a:r>
+            <a:r>
+              <a:rPr lang="el-GR" dirty="0" smtClean="0"/>
+              <a:t>: Η συνάρτηση </a:t>
+            </a:r>
+            <a:r>
+              <a:rPr lang="el-GR" dirty="0" err="1" smtClean="0"/>
+              <a:t>load_config</a:t>
+            </a:r>
+            <a:r>
+              <a:rPr lang="el-GR" dirty="0" smtClean="0"/>
+              <a:t> φορτώνει τις ρυθμίσεις από ένα αρχείο YAML (προεπιλεγμένα από το αρχείο </a:t>
+            </a:r>
+            <a:r>
+              <a:rPr lang="el-GR" dirty="0" err="1" smtClean="0"/>
+              <a:t>config.yaml</a:t>
+            </a:r>
+            <a:r>
+              <a:rPr lang="el-GR" dirty="0" smtClean="0"/>
+              <a:t> στον φάκελο </a:t>
+            </a:r>
+            <a:r>
+              <a:rPr lang="el-GR" dirty="0" err="1" smtClean="0"/>
+              <a:t>config</a:t>
+            </a:r>
+            <a:r>
+              <a:rPr lang="el-GR" dirty="0" smtClean="0"/>
+              <a:t>). Αν το αρχείο δεν βρεθεί ή υπάρχει σφάλμα στην ανάλυση του YAML, εμφανίζεται το αντίστοιχο σφάλμα.</a:t>
+            </a:r>
+          </a:p>
+          <a:p>
+            <a:r>
+              <a:rPr lang="el-GR" b="1" dirty="0" smtClean="0"/>
+              <a:t>Ανάκτηση του API </a:t>
+            </a:r>
+            <a:r>
+              <a:rPr lang="el-GR" b="1" dirty="0" err="1" smtClean="0"/>
+              <a:t>Key</a:t>
+            </a:r>
+            <a:r>
+              <a:rPr lang="el-GR" dirty="0" smtClean="0"/>
+              <a:t>: Η συνάρτηση </a:t>
+            </a:r>
+            <a:r>
+              <a:rPr lang="el-GR" dirty="0" err="1" smtClean="0"/>
+              <a:t>get_api_key</a:t>
+            </a:r>
+            <a:r>
+              <a:rPr lang="el-GR" dirty="0" smtClean="0"/>
+              <a:t> ανακτά το API </a:t>
+            </a:r>
+            <a:r>
+              <a:rPr lang="el-GR" dirty="0" err="1" smtClean="0"/>
+              <a:t>Key</a:t>
+            </a:r>
+            <a:r>
+              <a:rPr lang="el-GR" dirty="0" smtClean="0"/>
+              <a:t> από τις μεταβλητές περιβάλλοντος.</a:t>
+            </a:r>
+          </a:p>
+          <a:p>
+            <a:r>
+              <a:rPr lang="el-GR" b="1" dirty="0" smtClean="0"/>
+              <a:t>Ανάκτηση του </a:t>
+            </a:r>
+            <a:r>
+              <a:rPr lang="el-GR" b="1" dirty="0" err="1" smtClean="0"/>
+              <a:t>Supabase</a:t>
+            </a:r>
+            <a:r>
+              <a:rPr lang="el-GR" b="1" dirty="0" smtClean="0"/>
+              <a:t> URL</a:t>
+            </a:r>
+            <a:r>
+              <a:rPr lang="el-GR" dirty="0" smtClean="0"/>
+              <a:t>: Η συνάρτηση </a:t>
+            </a:r>
+            <a:r>
+              <a:rPr lang="el-GR" dirty="0" err="1" smtClean="0"/>
+              <a:t>get_supabase_url</a:t>
+            </a:r>
+            <a:r>
+              <a:rPr lang="el-GR" dirty="0" smtClean="0"/>
+              <a:t> ανακτά το URL του </a:t>
+            </a:r>
+            <a:r>
+              <a:rPr lang="el-GR" dirty="0" err="1" smtClean="0"/>
+              <a:t>Supabase</a:t>
+            </a:r>
+            <a:r>
+              <a:rPr lang="en-US" dirty="0" smtClean="0"/>
               <a:t> </a:t>
             </a:r>
             <a:r>
               <a:rPr lang="el-GR" dirty="0" smtClean="0"/>
-              <a:t>φάση </a:t>
-            </a:r>
-            <a:r>
-              <a:rPr lang="en-US" dirty="0" smtClean="0"/>
-              <a:t>raspberry)</a:t>
-            </a:r>
-            <a:r>
-              <a:rPr lang="el-GR" dirty="0" smtClean="0"/>
-              <a:t> και του </a:t>
-            </a:r>
-            <a:r>
-              <a:rPr lang="en-US" dirty="0" err="1" smtClean="0"/>
-              <a:t>Arduino</a:t>
-            </a:r>
-            <a:r>
-              <a:rPr lang="el-GR" dirty="0" smtClean="0"/>
-              <a:t>  &lt;</a:t>
-            </a:r>
-            <a:r>
-              <a:rPr lang="en-US" dirty="0" err="1" smtClean="0"/>
-              <a:t>setup_serial_connection</a:t>
-            </a:r>
-            <a:r>
-              <a:rPr lang="el-GR" dirty="0" smtClean="0"/>
-              <a:t>&gt; καθορίζεται η επικοινωνία.</a:t>
-            </a:r>
-          </a:p>
-          <a:p>
-            <a:r>
-              <a:rPr lang="el-GR" b="1" dirty="0" smtClean="0"/>
-              <a:t>Διαβάζει μια σειρά από δεδομένα: </a:t>
-            </a:r>
-            <a:r>
-              <a:rPr lang="el-GR" dirty="0" smtClean="0"/>
-              <a:t>τα δεδομένα που έρχονται από το </a:t>
-            </a:r>
-            <a:r>
-              <a:rPr lang="en-US" dirty="0" err="1" smtClean="0"/>
-              <a:t>Arduino</a:t>
-            </a:r>
-            <a:r>
-              <a:rPr lang="el-GR" dirty="0" smtClean="0"/>
-              <a:t> και τα αποθηκεύει σε 3 μεταβλητές.</a:t>
-            </a:r>
-          </a:p>
-          <a:p>
+              <a:t>από τις μεταβλητές περιβάλλοντος</a:t>
+            </a:r>
+            <a:r>
+              <a:rPr lang="en-US" dirty="0" smtClean="0"/>
+              <a:t>.</a:t>
+            </a:r>
             <a:endParaRPr lang="el-GR" dirty="0"/>
           </a:p>
         </p:txBody>
@@ -5468,6 +5445,186 @@
 </file>
 
 <file path=ppt/slides/slide23.xml><?xml version="1.0" encoding="utf-8"?>
+<p:sld xmlns:a="http://schemas.openxmlformats.org/drawingml/2006/main" xmlns:r="http://schemas.openxmlformats.org/officeDocument/2006/relationships" xmlns:p="http://schemas.openxmlformats.org/presentationml/2006/main">
+  <p:cSld>
+    <p:spTree>
+      <p:nvGrpSpPr>
+        <p:cNvPr id="1" name=""/>
+        <p:cNvGrpSpPr/>
+        <p:nvPr/>
+      </p:nvGrpSpPr>
+      <p:grpSpPr>
+        <a:xfrm>
+          <a:off x="0" y="0"/>
+          <a:ext cx="0" cy="0"/>
+          <a:chOff x="0" y="0"/>
+          <a:chExt cx="0" cy="0"/>
+        </a:xfrm>
+      </p:grpSpPr>
+      <p:sp>
+        <p:nvSpPr>
+          <p:cNvPr id="2" name="1 - Τίτλος"/>
+          <p:cNvSpPr>
+            <a:spLocks noGrp="1"/>
+          </p:cNvSpPr>
+          <p:nvPr>
+            <p:ph type="title"/>
+          </p:nvPr>
+        </p:nvSpPr>
+        <p:spPr/>
+        <p:txBody>
+          <a:bodyPr>
+            <a:normAutofit fontScale="90000"/>
+          </a:bodyPr>
+          <a:lstStyle/>
+          <a:p>
+            <a:r>
+              <a:rPr lang="el-GR" dirty="0" smtClean="0"/>
+              <a:t>Περιγραφή αρχείων </a:t>
+            </a:r>
+            <a:r>
+              <a:rPr lang="de-DE" dirty="0" err="1" smtClean="0"/>
+              <a:t>source</a:t>
+            </a:r>
+            <a:r>
+              <a:rPr lang="de-DE" dirty="0" smtClean="0"/>
+              <a:t> </a:t>
+            </a:r>
+            <a:r>
+              <a:rPr lang="de-DE" dirty="0" err="1" smtClean="0"/>
+              <a:t>code</a:t>
+            </a:r>
+            <a:r>
+              <a:rPr lang="el-GR" dirty="0" smtClean="0"/>
+              <a:t> (</a:t>
+            </a:r>
+            <a:r>
+              <a:rPr lang="en-US" dirty="0" smtClean="0"/>
+              <a:t>3</a:t>
+            </a:r>
+            <a:r>
+              <a:rPr lang="el-GR" dirty="0" smtClean="0"/>
+              <a:t>)</a:t>
+            </a:r>
+            <a:endParaRPr lang="el-GR" dirty="0"/>
+          </a:p>
+        </p:txBody>
+      </p:sp>
+      <p:sp>
+        <p:nvSpPr>
+          <p:cNvPr id="3" name="2 - Θέση περιεχομένου"/>
+          <p:cNvSpPr>
+            <a:spLocks noGrp="1"/>
+          </p:cNvSpPr>
+          <p:nvPr>
+            <p:ph idx="1"/>
+          </p:nvPr>
+        </p:nvSpPr>
+        <p:spPr/>
+        <p:txBody>
+          <a:bodyPr>
+            <a:normAutofit lnSpcReduction="10000"/>
+          </a:bodyPr>
+          <a:lstStyle/>
+          <a:p>
+            <a:pPr>
+              <a:buNone/>
+            </a:pPr>
+            <a:r>
+              <a:rPr lang="en-US" dirty="0" smtClean="0"/>
+              <a:t>Serial_communication.py</a:t>
+            </a:r>
+            <a:r>
+              <a:rPr lang="el-GR" dirty="0" smtClean="0"/>
+              <a:t>:</a:t>
+            </a:r>
+          </a:p>
+          <a:p>
+            <a:r>
+              <a:rPr lang="el-GR" b="1" dirty="0" smtClean="0"/>
+              <a:t>Δημιουργεί την σειριακή επικοινωνία: </a:t>
+            </a:r>
+            <a:r>
+              <a:rPr lang="el-GR" dirty="0" smtClean="0"/>
+              <a:t>μεταξύ του υπολογιστή</a:t>
+            </a:r>
+            <a:r>
+              <a:rPr lang="en-US" dirty="0" smtClean="0"/>
+              <a:t> (</a:t>
+            </a:r>
+            <a:r>
+              <a:rPr lang="el-GR" dirty="0" smtClean="0"/>
+              <a:t>στην </a:t>
+            </a:r>
+            <a:r>
+              <a:rPr lang="de-DE" dirty="0" err="1" smtClean="0"/>
+              <a:t>production</a:t>
+            </a:r>
+            <a:r>
+              <a:rPr lang="de-DE" dirty="0" smtClean="0"/>
+              <a:t> </a:t>
+            </a:r>
+            <a:r>
+              <a:rPr lang="el-GR" dirty="0" smtClean="0"/>
+              <a:t>φάση </a:t>
+            </a:r>
+            <a:r>
+              <a:rPr lang="en-US" dirty="0" smtClean="0"/>
+              <a:t>raspberry)</a:t>
+            </a:r>
+            <a:r>
+              <a:rPr lang="el-GR" dirty="0" smtClean="0"/>
+              <a:t> και του </a:t>
+            </a:r>
+            <a:r>
+              <a:rPr lang="en-US" dirty="0" err="1" smtClean="0"/>
+              <a:t>Arduino</a:t>
+            </a:r>
+            <a:r>
+              <a:rPr lang="el-GR" dirty="0" smtClean="0"/>
+              <a:t>  &lt;</a:t>
+            </a:r>
+            <a:r>
+              <a:rPr lang="en-US" dirty="0" err="1" smtClean="0"/>
+              <a:t>setup_serial_connection</a:t>
+            </a:r>
+            <a:r>
+              <a:rPr lang="el-GR" dirty="0" smtClean="0"/>
+              <a:t>&gt; καθορίζεται η επικοινωνία.</a:t>
+            </a:r>
+          </a:p>
+          <a:p>
+            <a:r>
+              <a:rPr lang="el-GR" b="1" dirty="0" smtClean="0"/>
+              <a:t>Διαβάζει μια σειρά από δεδομένα: </a:t>
+            </a:r>
+            <a:r>
+              <a:rPr lang="el-GR" dirty="0" smtClean="0"/>
+              <a:t>τα δεδομένα που έρχονται από το </a:t>
+            </a:r>
+            <a:r>
+              <a:rPr lang="en-US" dirty="0" err="1" smtClean="0"/>
+              <a:t>Arduino</a:t>
+            </a:r>
+            <a:r>
+              <a:rPr lang="el-GR" dirty="0" smtClean="0"/>
+              <a:t> και τα αποθηκεύει σε 3 μεταβλητές.</a:t>
+            </a:r>
+          </a:p>
+          <a:p>
+            <a:endParaRPr lang="el-GR" dirty="0"/>
+          </a:p>
+        </p:txBody>
+      </p:sp>
+    </p:spTree>
+  </p:cSld>
+  <p:clrMapOvr>
+    <a:masterClrMapping/>
+  </p:clrMapOvr>
+</p:sld>
+</file>
+
+<file path=ppt/slides/slide24.xml><?xml version="1.0" encoding="utf-8"?>
 <p:sld xmlns:a="http://schemas.openxmlformats.org/drawingml/2006/main" xmlns:r="http://schemas.openxmlformats.org/officeDocument/2006/relationships" xmlns:p="http://schemas.openxmlformats.org/presentationml/2006/main">
   <p:cSld>
     <p:spTree>
@@ -5620,7 +5777,7 @@
 </p:sld>
 </file>
 
-<file path=ppt/slides/slide24.xml><?xml version="1.0" encoding="utf-8"?>
+<file path=ppt/slides/slide25.xml><?xml version="1.0" encoding="utf-8"?>
 <p:sld xmlns:a="http://schemas.openxmlformats.org/drawingml/2006/main" xmlns:r="http://schemas.openxmlformats.org/officeDocument/2006/relationships" xmlns:p="http://schemas.openxmlformats.org/presentationml/2006/main">
   <p:cSld>
     <p:spTree>
@@ -5715,7 +5872,7 @@
 </p:sld>
 </file>
 
-<file path=ppt/slides/slide25.xml><?xml version="1.0" encoding="utf-8"?>
+<file path=ppt/slides/slide26.xml><?xml version="1.0" encoding="utf-8"?>
 <p:sld xmlns:a="http://schemas.openxmlformats.org/drawingml/2006/main" xmlns:r="http://schemas.openxmlformats.org/officeDocument/2006/relationships" xmlns:p="http://schemas.openxmlformats.org/presentationml/2006/main">
   <p:cSld>
     <p:spTree>
@@ -5810,7 +5967,7 @@
 </p:sld>
 </file>
 
-<file path=ppt/slides/slide26.xml><?xml version="1.0" encoding="utf-8"?>
+<file path=ppt/slides/slide27.xml><?xml version="1.0" encoding="utf-8"?>
 <p:sld xmlns:a="http://schemas.openxmlformats.org/drawingml/2006/main" xmlns:r="http://schemas.openxmlformats.org/officeDocument/2006/relationships" xmlns:p="http://schemas.openxmlformats.org/presentationml/2006/main">
   <p:cSld>
     <p:spTree>
@@ -6007,7 +6164,7 @@
 </p:sld>
 </file>
 
-<file path=ppt/slides/slide27.xml><?xml version="1.0" encoding="utf-8"?>
+<file path=ppt/slides/slide28.xml><?xml version="1.0" encoding="utf-8"?>
 <p:sld xmlns:a="http://schemas.openxmlformats.org/drawingml/2006/main" xmlns:r="http://schemas.openxmlformats.org/officeDocument/2006/relationships" xmlns:p="http://schemas.openxmlformats.org/presentationml/2006/main">
   <p:cSld>
     <p:spTree>
@@ -6153,294 +6310,6 @@
 </p:sld>
 </file>
 
-<file path=ppt/slides/slide28.xml><?xml version="1.0" encoding="utf-8"?>
-<p:sld xmlns:a="http://schemas.openxmlformats.org/drawingml/2006/main" xmlns:r="http://schemas.openxmlformats.org/officeDocument/2006/relationships" xmlns:p="http://schemas.openxmlformats.org/presentationml/2006/main">
-  <p:cSld>
-    <p:spTree>
-      <p:nvGrpSpPr>
-        <p:cNvPr id="1" name=""/>
-        <p:cNvGrpSpPr/>
-        <p:nvPr/>
-      </p:nvGrpSpPr>
-      <p:grpSpPr>
-        <a:xfrm>
-          <a:off x="0" y="0"/>
-          <a:ext cx="0" cy="0"/>
-          <a:chOff x="0" y="0"/>
-          <a:chExt cx="0" cy="0"/>
-        </a:xfrm>
-      </p:grpSpPr>
-      <p:sp>
-        <p:nvSpPr>
-          <p:cNvPr id="2" name="1 - Τίτλος"/>
-          <p:cNvSpPr>
-            <a:spLocks noGrp="1"/>
-          </p:cNvSpPr>
-          <p:nvPr>
-            <p:ph type="title"/>
-          </p:nvPr>
-        </p:nvSpPr>
-        <p:spPr/>
-        <p:txBody>
-          <a:bodyPr/>
-          <a:lstStyle/>
-          <a:p>
-            <a:r>
-              <a:rPr lang="en-US" dirty="0" err="1" smtClean="0"/>
-              <a:t>Vercel</a:t>
-            </a:r>
-            <a:r>
-              <a:rPr lang="en-US" dirty="0" smtClean="0"/>
-              <a:t> Setting-Up</a:t>
-            </a:r>
-            <a:endParaRPr lang="el-GR" dirty="0"/>
-          </a:p>
-        </p:txBody>
-      </p:sp>
-      <p:sp>
-        <p:nvSpPr>
-          <p:cNvPr id="3" name="2 - Θέση περιεχομένου"/>
-          <p:cNvSpPr>
-            <a:spLocks noGrp="1"/>
-          </p:cNvSpPr>
-          <p:nvPr>
-            <p:ph idx="1"/>
-          </p:nvPr>
-        </p:nvSpPr>
-        <p:spPr/>
-        <p:txBody>
-          <a:bodyPr>
-            <a:normAutofit fontScale="77500" lnSpcReduction="20000"/>
-          </a:bodyPr>
-          <a:lstStyle/>
-          <a:p>
-            <a:r>
-              <a:rPr lang="el-GR" dirty="0" smtClean="0"/>
-              <a:t>Έχει δημιουργηθεί </a:t>
-            </a:r>
-            <a:r>
-              <a:rPr lang="en-US" dirty="0" err="1" smtClean="0"/>
-              <a:t>git</a:t>
-            </a:r>
-            <a:r>
-              <a:rPr lang="en-US" dirty="0" smtClean="0"/>
-              <a:t> </a:t>
-            </a:r>
-            <a:r>
-              <a:rPr lang="el-GR" dirty="0" smtClean="0"/>
-              <a:t>μέσα σε έναν Η/Υ </a:t>
-            </a:r>
-            <a:endParaRPr lang="en-US" dirty="0" smtClean="0"/>
-          </a:p>
-          <a:p>
-            <a:r>
-              <a:rPr lang="el-GR" dirty="0" smtClean="0"/>
-              <a:t>Για να </a:t>
-            </a:r>
-            <a:r>
-              <a:rPr lang="el-GR" dirty="0" err="1" smtClean="0"/>
-              <a:t>σεταρουμε</a:t>
-            </a:r>
-            <a:r>
-              <a:rPr lang="el-GR" dirty="0" smtClean="0"/>
-              <a:t> το περιβάλλον πρέπει δημιουργηθεί το αρχείο .</a:t>
-            </a:r>
-            <a:r>
-              <a:rPr lang="en-US" dirty="0" err="1" smtClean="0"/>
-              <a:t>env</a:t>
-            </a:r>
-            <a:r>
-              <a:rPr lang="el-GR" dirty="0" smtClean="0"/>
-              <a:t>.</a:t>
-            </a:r>
-            <a:r>
-              <a:rPr lang="en-US" dirty="0" smtClean="0"/>
-              <a:t>local</a:t>
-            </a:r>
-            <a:r>
-              <a:rPr lang="el-GR" dirty="0" smtClean="0"/>
-              <a:t> στο ίδιο επίπεδο με το </a:t>
-            </a:r>
-            <a:r>
-              <a:rPr lang="de-DE" dirty="0" err="1" smtClean="0"/>
-              <a:t>package</a:t>
-            </a:r>
-            <a:r>
-              <a:rPr lang="en-US" dirty="0" smtClean="0"/>
-              <a:t>-lock </a:t>
-            </a:r>
-            <a:r>
-              <a:rPr lang="el-GR" dirty="0" smtClean="0"/>
-              <a:t>και </a:t>
-            </a:r>
-            <a:r>
-              <a:rPr lang="en-US" dirty="0" smtClean="0"/>
-              <a:t>next-</a:t>
-            </a:r>
-            <a:r>
-              <a:rPr lang="en-US" dirty="0" err="1" smtClean="0"/>
-              <a:t>env.d</a:t>
-            </a:r>
-            <a:endParaRPr lang="el-GR" dirty="0" smtClean="0"/>
-          </a:p>
-          <a:p>
-            <a:r>
-              <a:rPr lang="el-GR" dirty="0" smtClean="0"/>
-              <a:t>Κάνεις πρώτα εγκατάσταση την </a:t>
-            </a:r>
-            <a:r>
-              <a:rPr lang="en-US" dirty="0" err="1" smtClean="0"/>
-              <a:t>nodejs</a:t>
-            </a:r>
-            <a:endParaRPr lang="el-GR" dirty="0" smtClean="0"/>
-          </a:p>
-          <a:p>
-            <a:r>
-              <a:rPr lang="el-GR" dirty="0" smtClean="0"/>
-              <a:t>Πρέπει να γίνει</a:t>
-            </a:r>
-            <a:r>
-              <a:rPr lang="en-US" dirty="0" smtClean="0"/>
-              <a:t>:</a:t>
-            </a:r>
-          </a:p>
-          <a:p>
-            <a:pPr lvl="1"/>
-            <a:r>
-              <a:rPr lang="el-GR" dirty="0" smtClean="0"/>
-              <a:t> </a:t>
-            </a:r>
-            <a:r>
-              <a:rPr lang="en-US" dirty="0" err="1" smtClean="0"/>
-              <a:t>npm</a:t>
-            </a:r>
-            <a:r>
-              <a:rPr lang="en-US" dirty="0" smtClean="0"/>
-              <a:t> install @</a:t>
-            </a:r>
-            <a:r>
-              <a:rPr lang="en-US" dirty="0" err="1" smtClean="0"/>
-              <a:t>supabase</a:t>
-            </a:r>
-            <a:r>
-              <a:rPr lang="en-US" dirty="0" smtClean="0"/>
-              <a:t>/</a:t>
-            </a:r>
-            <a:r>
-              <a:rPr lang="en-US" dirty="0" err="1" smtClean="0"/>
-              <a:t>supabase-js</a:t>
-            </a:r>
-            <a:r>
-              <a:rPr lang="en-US" dirty="0" smtClean="0"/>
-              <a:t> @</a:t>
-            </a:r>
-            <a:r>
-              <a:rPr lang="en-US" dirty="0" err="1" smtClean="0"/>
-              <a:t>supabase</a:t>
-            </a:r>
-            <a:r>
-              <a:rPr lang="en-US" dirty="0" smtClean="0"/>
-              <a:t>/auth-helpers-</a:t>
-            </a:r>
-            <a:r>
-              <a:rPr lang="en-US" dirty="0" err="1" smtClean="0"/>
-              <a:t>nextjs</a:t>
-            </a:r>
-            <a:r>
-              <a:rPr lang="en-US" dirty="0" smtClean="0"/>
-              <a:t> @</a:t>
-            </a:r>
-            <a:r>
-              <a:rPr lang="en-US" dirty="0" err="1" smtClean="0"/>
-              <a:t>supabase</a:t>
-            </a:r>
-            <a:r>
-              <a:rPr lang="en-US" dirty="0" smtClean="0"/>
-              <a:t>/</a:t>
-            </a:r>
-            <a:r>
-              <a:rPr lang="en-US" dirty="0" err="1" smtClean="0"/>
-              <a:t>ssr</a:t>
-            </a:r>
-            <a:r>
-              <a:rPr lang="en-US" dirty="0" smtClean="0"/>
-              <a:t> , </a:t>
-            </a:r>
-            <a:r>
-              <a:rPr lang="el-GR" dirty="0" err="1" smtClean="0"/>
-              <a:t>μεσα</a:t>
-            </a:r>
-            <a:r>
-              <a:rPr lang="el-GR" dirty="0" smtClean="0"/>
-              <a:t> στον φάκελο, καθώς επίσης και</a:t>
-            </a:r>
-            <a:endParaRPr lang="en-US" dirty="0" smtClean="0"/>
-          </a:p>
-          <a:p>
-            <a:pPr lvl="1"/>
-            <a:r>
-              <a:rPr lang="en-US" dirty="0" err="1" smtClean="0"/>
-              <a:t>npm</a:t>
-            </a:r>
-            <a:r>
-              <a:rPr lang="en-US" dirty="0" smtClean="0"/>
-              <a:t> run dev </a:t>
-            </a:r>
-            <a:r>
-              <a:rPr lang="el-GR" dirty="0" smtClean="0"/>
-              <a:t>, για να τρέξει τοπικά η εφαρμογή</a:t>
-            </a:r>
-          </a:p>
-          <a:p>
-            <a:r>
-              <a:rPr lang="el-GR" dirty="0" smtClean="0"/>
-              <a:t>Συγκεκριμένα εδώ </a:t>
-            </a:r>
-            <a:r>
-              <a:rPr lang="en-US" dirty="0" err="1" smtClean="0"/>
-              <a:t>cd</a:t>
-            </a:r>
-            <a:r>
-              <a:rPr lang="en-US" dirty="0" smtClean="0"/>
-              <a:t> Desktop/ Diploma\ Thesis/ 2. </a:t>
-            </a:r>
-            <a:r>
-              <a:rPr lang="en-US" dirty="0" err="1" smtClean="0"/>
-              <a:t>nextjs</a:t>
-            </a:r>
-            <a:endParaRPr lang="en-US" dirty="0" smtClean="0"/>
-          </a:p>
-          <a:p>
-            <a:r>
-              <a:rPr lang="el-GR" dirty="0" smtClean="0"/>
-              <a:t>Και πολύ σημαντικό είναι ότι υπάρχουν παράλληλα εδώ τα 0.</a:t>
-            </a:r>
-            <a:r>
-              <a:rPr lang="en-US" dirty="0" smtClean="0"/>
-              <a:t> </a:t>
-            </a:r>
-            <a:r>
-              <a:rPr lang="en-US" dirty="0" err="1" smtClean="0"/>
-              <a:t>arduino</a:t>
-            </a:r>
-            <a:r>
-              <a:rPr lang="en-US" dirty="0" smtClean="0"/>
-              <a:t> &amp; 1. raspberry</a:t>
-            </a:r>
-          </a:p>
-          <a:p>
-            <a:endParaRPr lang="el-GR" dirty="0"/>
-          </a:p>
-        </p:txBody>
-      </p:sp>
-    </p:spTree>
-  </p:cSld>
-  <p:clrMapOvr>
-    <a:masterClrMapping/>
-  </p:clrMapOvr>
-</p:sld>
-</file>
-
 <file path=ppt/slides/slide29.xml><?xml version="1.0" encoding="utf-8"?>
 <p:sld xmlns:a="http://schemas.openxmlformats.org/drawingml/2006/main" xmlns:r="http://schemas.openxmlformats.org/officeDocument/2006/relationships" xmlns:p="http://schemas.openxmlformats.org/presentationml/2006/main">
   <p:cSld>
@@ -6474,106 +6343,249 @@
           <a:lstStyle/>
           <a:p>
             <a:r>
+              <a:rPr lang="en-US" dirty="0" err="1" smtClean="0"/>
+              <a:t>Vercel</a:t>
+            </a:r>
+            <a:r>
+              <a:rPr lang="en-US" dirty="0" smtClean="0"/>
+              <a:t> Setting-Up</a:t>
+            </a:r>
+            <a:endParaRPr lang="el-GR" dirty="0"/>
+          </a:p>
+        </p:txBody>
+      </p:sp>
+      <p:sp>
+        <p:nvSpPr>
+          <p:cNvPr id="3" name="2 - Θέση περιεχομένου"/>
+          <p:cNvSpPr>
+            <a:spLocks noGrp="1"/>
+          </p:cNvSpPr>
+          <p:nvPr>
+            <p:ph idx="1"/>
+          </p:nvPr>
+        </p:nvSpPr>
+        <p:spPr/>
+        <p:txBody>
+          <a:bodyPr>
+            <a:normAutofit fontScale="77500" lnSpcReduction="20000"/>
+          </a:bodyPr>
+          <a:lstStyle/>
+          <a:p>
+            <a:r>
+              <a:rPr lang="el-GR" dirty="0" smtClean="0"/>
+              <a:t>Έχει δημιουργηθεί </a:t>
+            </a:r>
+            <a:r>
+              <a:rPr lang="en-US" dirty="0" err="1" smtClean="0"/>
+              <a:t>git</a:t>
+            </a:r>
+            <a:r>
+              <a:rPr lang="en-US" dirty="0" smtClean="0"/>
+              <a:t> </a:t>
+            </a:r>
+            <a:r>
+              <a:rPr lang="el-GR" dirty="0" smtClean="0"/>
+              <a:t>μέσα σε έναν Η/Υ </a:t>
+            </a:r>
+            <a:endParaRPr lang="en-US" dirty="0" smtClean="0"/>
+          </a:p>
+          <a:p>
+            <a:r>
+              <a:rPr lang="el-GR" dirty="0" smtClean="0"/>
+              <a:t>Για να </a:t>
+            </a:r>
+            <a:r>
+              <a:rPr lang="el-GR" dirty="0" err="1" smtClean="0"/>
+              <a:t>σεταρουμε</a:t>
+            </a:r>
+            <a:r>
+              <a:rPr lang="el-GR" dirty="0" smtClean="0"/>
+              <a:t> το περιβάλλον πρέπει δημιουργηθεί το αρχείο .</a:t>
+            </a:r>
+            <a:r>
+              <a:rPr lang="en-US" dirty="0" err="1" smtClean="0"/>
+              <a:t>env</a:t>
+            </a:r>
+            <a:r>
+              <a:rPr lang="el-GR" dirty="0" smtClean="0"/>
+              <a:t>.</a:t>
+            </a:r>
+            <a:r>
+              <a:rPr lang="en-US" dirty="0" smtClean="0"/>
+              <a:t>local</a:t>
+            </a:r>
+            <a:r>
+              <a:rPr lang="el-GR" dirty="0" smtClean="0"/>
+              <a:t> στο ίδιο επίπεδο με το </a:t>
+            </a:r>
+            <a:r>
               <a:rPr lang="de-DE" dirty="0" err="1" smtClean="0"/>
-              <a:t>Vercel</a:t>
-            </a:r>
-            <a:r>
-              <a:rPr lang="de-DE" dirty="0" smtClean="0"/>
+              <a:t>package</a:t>
+            </a:r>
+            <a:r>
+              <a:rPr lang="en-US" dirty="0" smtClean="0"/>
+              <a:t>-lock </a:t>
+            </a:r>
+            <a:r>
+              <a:rPr lang="el-GR" dirty="0" smtClean="0"/>
+              <a:t>και </a:t>
+            </a:r>
+            <a:r>
+              <a:rPr lang="en-US" dirty="0" smtClean="0"/>
+              <a:t>next-</a:t>
+            </a:r>
+            <a:r>
+              <a:rPr lang="en-US" dirty="0" err="1" smtClean="0"/>
+              <a:t>env.d</a:t>
+            </a:r>
+            <a:endParaRPr lang="el-GR" dirty="0" smtClean="0"/>
+          </a:p>
+          <a:p>
+            <a:r>
+              <a:rPr lang="el-GR" dirty="0" smtClean="0"/>
+              <a:t>Κάνεις πρώτα εγκατάσταση την </a:t>
+            </a:r>
+            <a:r>
+              <a:rPr lang="en-US" dirty="0" err="1" smtClean="0"/>
+              <a:t>nodejs</a:t>
+            </a:r>
+            <a:endParaRPr lang="el-GR" dirty="0" smtClean="0"/>
+          </a:p>
+          <a:p>
+            <a:r>
+              <a:rPr lang="el-GR" dirty="0" smtClean="0"/>
+              <a:t>Πρέπει να γίνει</a:t>
+            </a:r>
+            <a:r>
+              <a:rPr lang="en-US" dirty="0" smtClean="0"/>
+              <a:t>:</a:t>
+            </a:r>
+          </a:p>
+          <a:p>
+            <a:pPr lvl="1"/>
+            <a:r>
+              <a:rPr lang="el-GR" dirty="0" smtClean="0"/>
               <a:t> </a:t>
             </a:r>
             <a:r>
-              <a:rPr lang="de-DE" dirty="0" err="1" smtClean="0"/>
-              <a:t>Sharable</a:t>
-            </a:r>
-            <a:endParaRPr lang="el-GR" dirty="0"/>
-          </a:p>
-        </p:txBody>
-      </p:sp>
-      <p:pic>
-        <p:nvPicPr>
-          <p:cNvPr id="1026" name="Picture 2"/>
-          <p:cNvPicPr>
-            <a:picLocks noGrp="1" noChangeAspect="1" noChangeArrowheads="1"/>
-          </p:cNvPicPr>
-          <p:nvPr>
-            <p:ph idx="1"/>
-          </p:nvPr>
-        </p:nvPicPr>
-        <p:blipFill>
-          <a:blip r:embed="rId2" cstate="print"/>
-          <a:srcRect/>
-          <a:stretch>
-            <a:fillRect/>
-          </a:stretch>
-        </p:blipFill>
-        <p:spPr bwMode="auto">
-          <a:xfrm>
-            <a:off x="2267744" y="2708920"/>
-            <a:ext cx="4706453" cy="3855794"/>
-          </a:xfrm>
-          <a:prstGeom prst="rect">
-            <a:avLst/>
-          </a:prstGeom>
-          <a:noFill/>
-          <a:ln w="9525">
-            <a:noFill/>
-            <a:miter lim="800000"/>
-            <a:headEnd/>
-            <a:tailEnd/>
-          </a:ln>
-          <a:effectLst/>
-        </p:spPr>
-      </p:pic>
-      <p:sp>
-        <p:nvSpPr>
-          <p:cNvPr id="5" name="4 - TextBox"/>
-          <p:cNvSpPr txBox="1"/>
-          <p:nvPr/>
-        </p:nvSpPr>
-        <p:spPr>
-          <a:xfrm>
-            <a:off x="1259632" y="1844824"/>
-            <a:ext cx="6244273" cy="369332"/>
-          </a:xfrm>
-          <a:prstGeom prst="rect">
-            <a:avLst/>
-          </a:prstGeom>
-          <a:noFill/>
-        </p:spPr>
-        <p:txBody>
-          <a:bodyPr wrap="none" rtlCol="0">
-            <a:spAutoFit/>
-          </a:bodyPr>
-          <a:lstStyle/>
-          <a:p>
-            <a:r>
-              <a:rPr lang="el-GR" dirty="0" smtClean="0"/>
-              <a:t>Για να κάνω </a:t>
-            </a:r>
-            <a:r>
-              <a:rPr lang="de-DE" dirty="0" err="1" smtClean="0"/>
-              <a:t>share</a:t>
-            </a:r>
-            <a:r>
-              <a:rPr lang="el-GR" dirty="0" smtClean="0"/>
-              <a:t> κάποιο </a:t>
-            </a:r>
-            <a:r>
-              <a:rPr lang="de-DE" dirty="0" smtClean="0"/>
-              <a:t>link</a:t>
-            </a:r>
-            <a:r>
-              <a:rPr lang="el-GR" dirty="0" smtClean="0"/>
-              <a:t> σε όλους πρέπει να κάνω </a:t>
-            </a:r>
-            <a:r>
-              <a:rPr lang="de-DE" dirty="0" err="1" smtClean="0"/>
-              <a:t>upgrade</a:t>
-            </a:r>
-            <a:r>
-              <a:rPr lang="el-GR" dirty="0" smtClean="0"/>
-              <a:t>.</a:t>
-            </a:r>
+              <a:rPr lang="en-US" dirty="0" err="1" smtClean="0"/>
+              <a:t>npm</a:t>
+            </a:r>
+            <a:r>
+              <a:rPr lang="en-US" dirty="0" smtClean="0"/>
+              <a:t> install @</a:t>
+            </a:r>
+            <a:r>
+              <a:rPr lang="en-US" dirty="0" err="1" smtClean="0"/>
+              <a:t>supabase</a:t>
+            </a:r>
+            <a:r>
+              <a:rPr lang="en-US" dirty="0" smtClean="0"/>
+              <a:t>/</a:t>
+            </a:r>
+            <a:r>
+              <a:rPr lang="en-US" dirty="0" err="1" smtClean="0"/>
+              <a:t>supabase-js</a:t>
+            </a:r>
+            <a:r>
+              <a:rPr lang="en-US" dirty="0" smtClean="0"/>
+              <a:t> @</a:t>
+            </a:r>
+            <a:r>
+              <a:rPr lang="en-US" dirty="0" err="1" smtClean="0"/>
+              <a:t>supabase</a:t>
+            </a:r>
+            <a:r>
+              <a:rPr lang="en-US" dirty="0" smtClean="0"/>
+              <a:t>/auth-helpers-</a:t>
+            </a:r>
+            <a:r>
+              <a:rPr lang="en-US" dirty="0" err="1" smtClean="0"/>
+              <a:t>nextjs</a:t>
+            </a:r>
+            <a:r>
+              <a:rPr lang="en-US" dirty="0" smtClean="0"/>
+              <a:t> @</a:t>
+            </a:r>
+            <a:r>
+              <a:rPr lang="en-US" dirty="0" err="1" smtClean="0"/>
+              <a:t>supabase</a:t>
+            </a:r>
+            <a:r>
+              <a:rPr lang="en-US" dirty="0" smtClean="0"/>
+              <a:t>/</a:t>
+            </a:r>
+            <a:r>
+              <a:rPr lang="en-US" dirty="0" err="1" smtClean="0"/>
+              <a:t>ssr</a:t>
+            </a:r>
+            <a:r>
+              <a:rPr lang="en-US" dirty="0" smtClean="0"/>
+              <a:t> , </a:t>
+            </a:r>
+            <a:r>
+              <a:rPr lang="el-GR" dirty="0" err="1" smtClean="0"/>
+              <a:t>μεσα</a:t>
+            </a:r>
+            <a:r>
+              <a:rPr lang="el-GR" dirty="0" smtClean="0"/>
+              <a:t> στον φάκελο, καθώς επίσης και</a:t>
+            </a:r>
+            <a:endParaRPr lang="en-US" dirty="0" smtClean="0"/>
+          </a:p>
+          <a:p>
+            <a:pPr lvl="1"/>
+            <a:r>
+              <a:rPr lang="en-US" dirty="0" err="1" smtClean="0"/>
+              <a:t>npm</a:t>
+            </a:r>
+            <a:r>
+              <a:rPr lang="en-US" dirty="0" smtClean="0"/>
+              <a:t> run dev </a:t>
+            </a:r>
+            <a:r>
+              <a:rPr lang="el-GR" dirty="0" smtClean="0"/>
+              <a:t>, για να τρέξει τοπικά η εφαρμογή</a:t>
+            </a:r>
+          </a:p>
+          <a:p>
+            <a:r>
+              <a:rPr lang="el-GR" dirty="0" smtClean="0"/>
+              <a:t>Συγκεκριμένα εδώ </a:t>
+            </a:r>
+            <a:r>
+              <a:rPr lang="en-US" dirty="0" err="1" smtClean="0"/>
+              <a:t>cd</a:t>
+            </a:r>
+            <a:r>
+              <a:rPr lang="en-US" dirty="0" smtClean="0"/>
+              <a:t> Desktop/ Diploma\ Thesis/ 2. </a:t>
+            </a:r>
+            <a:r>
+              <a:rPr lang="en-US" dirty="0" err="1" smtClean="0"/>
+              <a:t>nextjs</a:t>
+            </a:r>
+            <a:endParaRPr lang="en-US" dirty="0" smtClean="0"/>
+          </a:p>
+          <a:p>
+            <a:r>
+              <a:rPr lang="el-GR" dirty="0" smtClean="0"/>
+              <a:t>Και πολύ σημαντικό είναι ότι υπάρχουν παράλληλα εδώ τα 0.</a:t>
+            </a:r>
+            <a:r>
+              <a:rPr lang="en-US" dirty="0" smtClean="0"/>
+              <a:t> </a:t>
+            </a:r>
+            <a:r>
+              <a:rPr lang="en-US" dirty="0" err="1" smtClean="0"/>
+              <a:t>arduino</a:t>
+            </a:r>
+            <a:r>
+              <a:rPr lang="en-US" dirty="0" smtClean="0"/>
+              <a:t> &amp; 1. raspberry</a:t>
+            </a:r>
+          </a:p>
+          <a:p>
             <a:endParaRPr lang="el-GR" dirty="0"/>
           </a:p>
         </p:txBody>
@@ -6720,6 +6732,151 @@
           <a:lstStyle/>
           <a:p>
             <a:r>
+              <a:rPr lang="de-DE" dirty="0" err="1" smtClean="0"/>
+              <a:t>Vercel</a:t>
+            </a:r>
+            <a:r>
+              <a:rPr lang="de-DE" dirty="0" smtClean="0"/>
+              <a:t> </a:t>
+            </a:r>
+            <a:r>
+              <a:rPr lang="de-DE" dirty="0" err="1" smtClean="0"/>
+              <a:t>Sharable</a:t>
+            </a:r>
+            <a:endParaRPr lang="el-GR" dirty="0"/>
+          </a:p>
+        </p:txBody>
+      </p:sp>
+      <p:pic>
+        <p:nvPicPr>
+          <p:cNvPr id="1026" name="Picture 2"/>
+          <p:cNvPicPr>
+            <a:picLocks noGrp="1" noChangeAspect="1" noChangeArrowheads="1"/>
+          </p:cNvPicPr>
+          <p:nvPr>
+            <p:ph idx="1"/>
+          </p:nvPr>
+        </p:nvPicPr>
+        <p:blipFill>
+          <a:blip r:embed="rId2" cstate="print"/>
+          <a:srcRect/>
+          <a:stretch>
+            <a:fillRect/>
+          </a:stretch>
+        </p:blipFill>
+        <p:spPr bwMode="auto">
+          <a:xfrm>
+            <a:off x="2267744" y="2708920"/>
+            <a:ext cx="4706453" cy="3855794"/>
+          </a:xfrm>
+          <a:prstGeom prst="rect">
+            <a:avLst/>
+          </a:prstGeom>
+          <a:noFill/>
+          <a:ln w="9525">
+            <a:noFill/>
+            <a:miter lim="800000"/>
+            <a:headEnd/>
+            <a:tailEnd/>
+          </a:ln>
+          <a:effectLst/>
+        </p:spPr>
+      </p:pic>
+      <p:sp>
+        <p:nvSpPr>
+          <p:cNvPr id="5" name="4 - TextBox"/>
+          <p:cNvSpPr txBox="1"/>
+          <p:nvPr/>
+        </p:nvSpPr>
+        <p:spPr>
+          <a:xfrm>
+            <a:off x="1259632" y="1844824"/>
+            <a:ext cx="6244273" cy="369332"/>
+          </a:xfrm>
+          <a:prstGeom prst="rect">
+            <a:avLst/>
+          </a:prstGeom>
+          <a:noFill/>
+        </p:spPr>
+        <p:txBody>
+          <a:bodyPr wrap="none" rtlCol="0">
+            <a:spAutoFit/>
+          </a:bodyPr>
+          <a:lstStyle/>
+          <a:p>
+            <a:r>
+              <a:rPr lang="el-GR" dirty="0" smtClean="0"/>
+              <a:t>Για να κάνω </a:t>
+            </a:r>
+            <a:r>
+              <a:rPr lang="de-DE" dirty="0" err="1" smtClean="0"/>
+              <a:t>share</a:t>
+            </a:r>
+            <a:r>
+              <a:rPr lang="el-GR" dirty="0" smtClean="0"/>
+              <a:t> κάποιο </a:t>
+            </a:r>
+            <a:r>
+              <a:rPr lang="de-DE" dirty="0" smtClean="0"/>
+              <a:t>link</a:t>
+            </a:r>
+            <a:r>
+              <a:rPr lang="el-GR" dirty="0" smtClean="0"/>
+              <a:t> σε όλους πρέπει να κάνω </a:t>
+            </a:r>
+            <a:r>
+              <a:rPr lang="de-DE" dirty="0" err="1" smtClean="0"/>
+              <a:t>upgrade</a:t>
+            </a:r>
+            <a:r>
+              <a:rPr lang="el-GR" dirty="0" smtClean="0"/>
+              <a:t>.</a:t>
+            </a:r>
+            <a:endParaRPr lang="el-GR" dirty="0"/>
+          </a:p>
+        </p:txBody>
+      </p:sp>
+    </p:spTree>
+  </p:cSld>
+  <p:clrMapOvr>
+    <a:masterClrMapping/>
+  </p:clrMapOvr>
+</p:sld>
+</file>
+
+<file path=ppt/slides/slide31.xml><?xml version="1.0" encoding="utf-8"?>
+<p:sld xmlns:a="http://schemas.openxmlformats.org/drawingml/2006/main" xmlns:r="http://schemas.openxmlformats.org/officeDocument/2006/relationships" xmlns:p="http://schemas.openxmlformats.org/presentationml/2006/main">
+  <p:cSld>
+    <p:spTree>
+      <p:nvGrpSpPr>
+        <p:cNvPr id="1" name=""/>
+        <p:cNvGrpSpPr/>
+        <p:nvPr/>
+      </p:nvGrpSpPr>
+      <p:grpSpPr>
+        <a:xfrm>
+          <a:off x="0" y="0"/>
+          <a:ext cx="0" cy="0"/>
+          <a:chOff x="0" y="0"/>
+          <a:chExt cx="0" cy="0"/>
+        </a:xfrm>
+      </p:grpSpPr>
+      <p:sp>
+        <p:nvSpPr>
+          <p:cNvPr id="2" name="1 - Τίτλος"/>
+          <p:cNvSpPr>
+            <a:spLocks noGrp="1"/>
+          </p:cNvSpPr>
+          <p:nvPr>
+            <p:ph type="title"/>
+          </p:nvPr>
+        </p:nvSpPr>
+        <p:spPr/>
+        <p:txBody>
+          <a:bodyPr/>
+          <a:lstStyle/>
+          <a:p>
+            <a:r>
               <a:rPr lang="en-US" dirty="0" err="1" smtClean="0"/>
               <a:t>Vercel</a:t>
             </a:r>
@@ -6774,7 +6931,7 @@
 </p:sld>
 </file>
 
-<file path=ppt/slides/slide31.xml><?xml version="1.0" encoding="utf-8"?>
+<file path=ppt/slides/slide32.xml><?xml version="1.0" encoding="utf-8"?>
 <p:sld xmlns:a="http://schemas.openxmlformats.org/drawingml/2006/main" xmlns:r="http://schemas.openxmlformats.org/officeDocument/2006/relationships" xmlns:p="http://schemas.openxmlformats.org/presentationml/2006/main">
   <p:cSld>
     <p:spTree>
@@ -6998,7 +7155,9 @@
         </p:nvSpPr>
         <p:spPr/>
         <p:txBody>
-          <a:bodyPr/>
+          <a:bodyPr>
+            <a:normAutofit/>
+          </a:bodyPr>
           <a:lstStyle/>
           <a:p>
             <a:r>
@@ -7011,7 +7170,7 @@
       </p:sp>
       <p:pic>
         <p:nvPicPr>
-          <p:cNvPr id="4" name="3 - Θέση περιεχομένου" descr="ssh for  Raspberry.png"/>
+          <p:cNvPr id="4" name="3 - Θέση περιεχομένου" descr="supabase.png"/>
           <p:cNvPicPr>
             <a:picLocks noGrp="1" noChangeAspect="1"/>
           </p:cNvPicPr>
@@ -7027,8 +7186,8 @@
         </p:blipFill>
         <p:spPr>
           <a:xfrm>
-            <a:off x="467544" y="2708920"/>
-            <a:ext cx="8229600" cy="3501837"/>
+            <a:off x="1619672" y="1772816"/>
+            <a:ext cx="5904656" cy="3760108"/>
           </a:xfrm>
         </p:spPr>
       </p:pic>
@@ -7040,8 +7199,8 @@
         </p:nvSpPr>
         <p:spPr>
           <a:xfrm>
-            <a:off x="467544" y="1412776"/>
-            <a:ext cx="8136904" cy="369332"/>
+            <a:off x="683568" y="1340768"/>
+            <a:ext cx="7992888" cy="369332"/>
           </a:xfrm>
           <a:prstGeom prst="rect">
             <a:avLst/>
@@ -7055,8 +7214,42 @@
           <a:lstStyle/>
           <a:p>
             <a:r>
-              <a:rPr lang="en-US" dirty="0" smtClean="0"/>
-              <a:t>Remote control commands on Raspberry Pi  for readings receiving</a:t>
+              <a:rPr lang="en-US" dirty="0" err="1" smtClean="0"/>
+              <a:t>Supabase</a:t>
+            </a:r>
+            <a:r>
+              <a:rPr lang="en-US" dirty="0" smtClean="0"/>
+              <a:t> needs to be set-up like so.</a:t>
+            </a:r>
+            <a:endParaRPr lang="el-GR" dirty="0"/>
+          </a:p>
+        </p:txBody>
+      </p:sp>
+      <p:sp>
+        <p:nvSpPr>
+          <p:cNvPr id="6" name="5 - TextBox"/>
+          <p:cNvSpPr txBox="1"/>
+          <p:nvPr/>
+        </p:nvSpPr>
+        <p:spPr>
+          <a:xfrm>
+            <a:off x="755576" y="5661248"/>
+            <a:ext cx="7488832" cy="646331"/>
+          </a:xfrm>
+          <a:prstGeom prst="rect">
+            <a:avLst/>
+          </a:prstGeom>
+          <a:noFill/>
+        </p:spPr>
+        <p:txBody>
+          <a:bodyPr wrap="square" rtlCol="0">
+            <a:spAutoFit/>
+          </a:bodyPr>
+          <a:lstStyle/>
+          <a:p>
+            <a:r>
+              <a:rPr lang="en-US" dirty="0" smtClean="0"/>
+              <a:t>Locate the database tables for posting (measurements) and for selecting (sensors) links and the service role key</a:t>
             </a:r>
             <a:endParaRPr lang="el-GR" dirty="0"/>
           </a:p>
@@ -7103,8 +7296,117 @@
           <a:lstStyle/>
           <a:p>
             <a:r>
-              <a:rPr lang="en-US" smtClean="0"/>
-              <a:t>Tutorial (5)</a:t>
+              <a:rPr lang="en-US" dirty="0" smtClean="0"/>
+              <a:t>Tutorial </a:t>
+            </a:r>
+            <a:r>
+              <a:rPr lang="en-US" dirty="0" smtClean="0"/>
+              <a:t>(5)</a:t>
+            </a:r>
+            <a:endParaRPr lang="el-GR" dirty="0"/>
+          </a:p>
+        </p:txBody>
+      </p:sp>
+      <p:pic>
+        <p:nvPicPr>
+          <p:cNvPr id="4" name="3 - Θέση περιεχομένου" descr="ssh for  Raspberry.png"/>
+          <p:cNvPicPr>
+            <a:picLocks noGrp="1" noChangeAspect="1"/>
+          </p:cNvPicPr>
+          <p:nvPr>
+            <p:ph idx="1"/>
+          </p:nvPr>
+        </p:nvPicPr>
+        <p:blipFill>
+          <a:blip r:embed="rId2" cstate="print"/>
+          <a:stretch>
+            <a:fillRect/>
+          </a:stretch>
+        </p:blipFill>
+        <p:spPr>
+          <a:xfrm>
+            <a:off x="467544" y="2708920"/>
+            <a:ext cx="8229600" cy="3501837"/>
+          </a:xfrm>
+        </p:spPr>
+      </p:pic>
+      <p:sp>
+        <p:nvSpPr>
+          <p:cNvPr id="5" name="4 - TextBox"/>
+          <p:cNvSpPr txBox="1"/>
+          <p:nvPr/>
+        </p:nvSpPr>
+        <p:spPr>
+          <a:xfrm>
+            <a:off x="467544" y="1412776"/>
+            <a:ext cx="8136904" cy="369332"/>
+          </a:xfrm>
+          <a:prstGeom prst="rect">
+            <a:avLst/>
+          </a:prstGeom>
+          <a:noFill/>
+        </p:spPr>
+        <p:txBody>
+          <a:bodyPr wrap="square" rtlCol="0">
+            <a:spAutoFit/>
+          </a:bodyPr>
+          <a:lstStyle/>
+          <a:p>
+            <a:r>
+              <a:rPr lang="en-US" dirty="0" smtClean="0"/>
+              <a:t>Remote control commands on Raspberry Pi  for readings receiving</a:t>
+            </a:r>
+            <a:endParaRPr lang="el-GR" dirty="0"/>
+          </a:p>
+        </p:txBody>
+      </p:sp>
+    </p:spTree>
+  </p:cSld>
+  <p:clrMapOvr>
+    <a:masterClrMapping/>
+  </p:clrMapOvr>
+</p:sld>
+</file>
+
+<file path=ppt/slides/slide7.xml><?xml version="1.0" encoding="utf-8"?>
+<p:sld xmlns:a="http://schemas.openxmlformats.org/drawingml/2006/main" xmlns:r="http://schemas.openxmlformats.org/officeDocument/2006/relationships" xmlns:p="http://schemas.openxmlformats.org/presentationml/2006/main">
+  <p:cSld>
+    <p:spTree>
+      <p:nvGrpSpPr>
+        <p:cNvPr id="1" name=""/>
+        <p:cNvGrpSpPr/>
+        <p:nvPr/>
+      </p:nvGrpSpPr>
+      <p:grpSpPr>
+        <a:xfrm>
+          <a:off x="0" y="0"/>
+          <a:ext cx="0" cy="0"/>
+          <a:chOff x="0" y="0"/>
+          <a:chExt cx="0" cy="0"/>
+        </a:xfrm>
+      </p:grpSpPr>
+      <p:sp>
+        <p:nvSpPr>
+          <p:cNvPr id="2" name="1 - Τίτλος"/>
+          <p:cNvSpPr>
+            <a:spLocks noGrp="1"/>
+          </p:cNvSpPr>
+          <p:nvPr>
+            <p:ph type="title"/>
+          </p:nvPr>
+        </p:nvSpPr>
+        <p:spPr/>
+        <p:txBody>
+          <a:bodyPr/>
+          <a:lstStyle/>
+          <a:p>
+            <a:r>
+              <a:rPr lang="en-US" dirty="0" smtClean="0"/>
+              <a:t>Tutorial </a:t>
+            </a:r>
+            <a:r>
+              <a:rPr lang="en-US" dirty="0" smtClean="0"/>
+              <a:t>(6)</a:t>
             </a:r>
             <a:endParaRPr lang="el-GR" dirty="0"/>
           </a:p>
@@ -7191,59 +7493,6 @@
 </p:sld>
 </file>
 
-<file path=ppt/slides/slide7.xml><?xml version="1.0" encoding="utf-8"?>
-<p:sld xmlns:a="http://schemas.openxmlformats.org/drawingml/2006/main" xmlns:r="http://schemas.openxmlformats.org/officeDocument/2006/relationships" xmlns:p="http://schemas.openxmlformats.org/presentationml/2006/main">
-  <p:cSld>
-    <p:spTree>
-      <p:nvGrpSpPr>
-        <p:cNvPr id="1" name=""/>
-        <p:cNvGrpSpPr/>
-        <p:nvPr/>
-      </p:nvGrpSpPr>
-      <p:grpSpPr>
-        <a:xfrm>
-          <a:off x="0" y="0"/>
-          <a:ext cx="0" cy="0"/>
-          <a:chOff x="0" y="0"/>
-          <a:chExt cx="0" cy="0"/>
-        </a:xfrm>
-      </p:grpSpPr>
-      <p:sp>
-        <p:nvSpPr>
-          <p:cNvPr id="2" name="1 - Τίτλος"/>
-          <p:cNvSpPr>
-            <a:spLocks noGrp="1"/>
-          </p:cNvSpPr>
-          <p:nvPr>
-            <p:ph type="title"/>
-          </p:nvPr>
-        </p:nvSpPr>
-        <p:spPr>
-          <a:xfrm>
-            <a:off x="467544" y="2780928"/>
-            <a:ext cx="8229600" cy="1143000"/>
-          </a:xfrm>
-        </p:spPr>
-        <p:txBody>
-          <a:bodyPr/>
-          <a:lstStyle/>
-          <a:p>
-            <a:r>
-              <a:rPr lang="en-US" dirty="0" smtClean="0"/>
-              <a:t>DETAILS</a:t>
-            </a:r>
-            <a:endParaRPr lang="el-GR" dirty="0"/>
-          </a:p>
-        </p:txBody>
-      </p:sp>
-    </p:spTree>
-  </p:cSld>
-  <p:clrMapOvr>
-    <a:masterClrMapping/>
-  </p:clrMapOvr>
-</p:sld>
-</file>
-
 <file path=ppt/slides/slide8.xml><?xml version="1.0" encoding="utf-8"?>
 <p:sld xmlns:a="http://schemas.openxmlformats.org/drawingml/2006/main" xmlns:r="http://schemas.openxmlformats.org/officeDocument/2006/relationships" xmlns:p="http://schemas.openxmlformats.org/presentationml/2006/main">
   <p:cSld>
@@ -7271,48 +7520,24 @@
             <p:ph type="title"/>
           </p:nvPr>
         </p:nvSpPr>
-        <p:spPr/>
-        <p:txBody>
-          <a:bodyPr>
-            <a:normAutofit/>
-          </a:bodyPr>
-          <a:lstStyle/>
-          <a:p>
-            <a:r>
-              <a:rPr lang="el-GR" dirty="0" smtClean="0"/>
-              <a:t>Περιγραφή </a:t>
-            </a:r>
-            <a:r>
-              <a:rPr lang="en-US" dirty="0" smtClean="0"/>
-              <a:t>Hardware (1)</a:t>
-            </a:r>
-            <a:endParaRPr lang="el-GR" dirty="0"/>
-          </a:p>
-        </p:txBody>
-      </p:sp>
-      <p:pic>
-        <p:nvPicPr>
-          <p:cNvPr id="4" name="3 - Θέση περιεχομένου" descr="adxl335.png"/>
-          <p:cNvPicPr>
-            <a:picLocks noGrp="1" noChangeAspect="1"/>
-          </p:cNvPicPr>
-          <p:nvPr>
-            <p:ph idx="1"/>
-          </p:nvPr>
-        </p:nvPicPr>
-        <p:blipFill>
-          <a:blip r:embed="rId2" cstate="print"/>
-          <a:stretch>
-            <a:fillRect/>
-          </a:stretch>
-        </p:blipFill>
         <p:spPr>
           <a:xfrm>
-            <a:off x="1972804" y="1600200"/>
-            <a:ext cx="5198391" cy="4525963"/>
+            <a:off x="467544" y="2780928"/>
+            <a:ext cx="8229600" cy="1143000"/>
           </a:xfrm>
         </p:spPr>
-      </p:pic>
+        <p:txBody>
+          <a:bodyPr/>
+          <a:lstStyle/>
+          <a:p>
+            <a:r>
+              <a:rPr lang="en-US" dirty="0" smtClean="0"/>
+              <a:t>DETAILS</a:t>
+            </a:r>
+            <a:endParaRPr lang="el-GR" dirty="0"/>
+          </a:p>
+        </p:txBody>
+      </p:sp>
     </p:spTree>
   </p:cSld>
   <p:clrMapOvr>
@@ -7350,7 +7575,9 @@
         </p:nvSpPr>
         <p:spPr/>
         <p:txBody>
-          <a:bodyPr/>
+          <a:bodyPr>
+            <a:normAutofit/>
+          </a:bodyPr>
           <a:lstStyle/>
           <a:p>
             <a:r>
@@ -7359,120 +7586,35 @@
             </a:r>
             <a:r>
               <a:rPr lang="en-US" dirty="0" smtClean="0"/>
-              <a:t>Hardware (2)</a:t>
+              <a:t>Hardware (1)</a:t>
             </a:r>
             <a:endParaRPr lang="el-GR" dirty="0"/>
           </a:p>
         </p:txBody>
       </p:sp>
-      <p:sp>
-        <p:nvSpPr>
-          <p:cNvPr id="3" name="2 - Θέση περιεχομένου"/>
-          <p:cNvSpPr>
-            <a:spLocks noGrp="1"/>
-          </p:cNvSpPr>
+      <p:pic>
+        <p:nvPicPr>
+          <p:cNvPr id="4" name="3 - Θέση περιεχομένου" descr="adxl335.png"/>
+          <p:cNvPicPr>
+            <a:picLocks noGrp="1" noChangeAspect="1"/>
+          </p:cNvPicPr>
           <p:nvPr>
             <p:ph idx="1"/>
           </p:nvPr>
-        </p:nvSpPr>
-        <p:spPr/>
-        <p:txBody>
-          <a:bodyPr>
-            <a:normAutofit fontScale="92500"/>
-          </a:bodyPr>
-          <a:lstStyle/>
-          <a:p>
-            <a:r>
-              <a:rPr lang="el-GR" dirty="0" smtClean="0"/>
-              <a:t>Παροχή ρεύματος στο </a:t>
-            </a:r>
-            <a:r>
-              <a:rPr lang="el-GR" dirty="0" err="1" smtClean="0"/>
-              <a:t>αξελερόμετρο</a:t>
-            </a:r>
-            <a:r>
-              <a:rPr lang="el-GR" dirty="0" smtClean="0"/>
-              <a:t> </a:t>
-            </a:r>
-            <a:r>
-              <a:rPr lang="en-US" dirty="0" smtClean="0"/>
-              <a:t>ADXL335</a:t>
-            </a:r>
-            <a:r>
-              <a:rPr lang="el-GR" dirty="0" smtClean="0"/>
-              <a:t> από το εν λειτουργία </a:t>
-            </a:r>
-            <a:r>
-              <a:rPr lang="en-US" dirty="0" err="1" smtClean="0"/>
-              <a:t>Arduino</a:t>
-            </a:r>
-            <a:r>
-              <a:rPr lang="en-US" dirty="0" smtClean="0"/>
-              <a:t> UNO</a:t>
-            </a:r>
-          </a:p>
-          <a:p>
-            <a:r>
-              <a:rPr lang="el-GR" dirty="0" smtClean="0"/>
-              <a:t>Διαθέτει το </a:t>
-            </a:r>
-            <a:r>
-              <a:rPr lang="en-US" dirty="0" smtClean="0"/>
-              <a:t>ADXL335 </a:t>
-            </a:r>
-            <a:r>
-              <a:rPr lang="el-GR" dirty="0" smtClean="0"/>
-              <a:t>τρεις αναλογικές εξόδους για μετρήσεις στο </a:t>
-            </a:r>
-            <a:r>
-              <a:rPr lang="el-GR" dirty="0" err="1" smtClean="0"/>
-              <a:t>ορθοκανονικό</a:t>
-            </a:r>
-            <a:r>
-              <a:rPr lang="el-GR" dirty="0" smtClean="0"/>
-              <a:t> σύστημα συντεταγμένων</a:t>
-            </a:r>
-          </a:p>
-          <a:p>
-            <a:r>
-              <a:rPr lang="el-GR" dirty="0" smtClean="0"/>
-              <a:t>Οι τρεις έξοδοι </a:t>
-            </a:r>
-            <a:r>
-              <a:rPr lang="en-US" dirty="0" err="1" smtClean="0"/>
-              <a:t>x,y,z</a:t>
-            </a:r>
-            <a:r>
-              <a:rPr lang="en-US" dirty="0" smtClean="0"/>
-              <a:t> </a:t>
-            </a:r>
-            <a:r>
-              <a:rPr lang="el-GR" dirty="0" smtClean="0"/>
-              <a:t>αναπαριστώνται πάνω στο </a:t>
-            </a:r>
-            <a:r>
-              <a:rPr lang="en-US" dirty="0" smtClean="0"/>
-              <a:t>ADXL335 Breakout</a:t>
-            </a:r>
-            <a:endParaRPr lang="el-GR" dirty="0" smtClean="0"/>
-          </a:p>
-          <a:p>
-            <a:r>
-              <a:rPr lang="el-GR" dirty="0" smtClean="0"/>
-              <a:t>Οι τρεις αναλογικές έξοδοι συνδέονται σε τρεις αναλογικές εισόδους του </a:t>
-            </a:r>
-            <a:r>
-              <a:rPr lang="en-US" dirty="0" err="1" smtClean="0"/>
-              <a:t>Arduino</a:t>
-            </a:r>
-            <a:r>
-              <a:rPr lang="en-US" dirty="0" smtClean="0"/>
-              <a:t> (A0,A1,A2)</a:t>
-            </a:r>
-            <a:endParaRPr lang="el-GR" dirty="0"/>
-          </a:p>
-        </p:txBody>
-      </p:sp>
+        </p:nvPicPr>
+        <p:blipFill>
+          <a:blip r:embed="rId2" cstate="print"/>
+          <a:stretch>
+            <a:fillRect/>
+          </a:stretch>
+        </p:blipFill>
+        <p:spPr>
+          <a:xfrm>
+            <a:off x="1972804" y="1600200"/>
+            <a:ext cx="5198391" cy="4525963"/>
+          </a:xfrm>
+        </p:spPr>
+      </p:pic>
     </p:spTree>
   </p:cSld>
   <p:clrMapOvr>
